--- a/docs/deck/Membrane_NullDeity_NGH26_132.pptx
+++ b/docs/deck/Membrane_NullDeity_NGH26_132.pptx
@@ -16,10 +16,9 @@
     <p:sldId id="262" r:id="rId9"/>
     <p:sldId id="263" r:id="rId10"/>
     <p:sldId id="265" r:id="rId11"/>
-    <p:sldId id="264" r:id="rId12"/>
-    <p:sldId id="266" r:id="rId13"/>
-    <p:sldId id="268" r:id="rId14"/>
-    <p:sldId id="271" r:id="rId15"/>
+    <p:sldId id="266" r:id="rId12"/>
+    <p:sldId id="268" r:id="rId13"/>
+    <p:sldId id="271" r:id="rId14"/>
   </p:sldIdLst>
   <p:sldSz cx="12191365" cy="6858000" type="screen4x3"/>
   <p:notesSz cx="6858000" cy="9144000"/>
@@ -126,7 +125,7 @@
             <a:srgbClr val="A4A3A4"/>
           </p15:clr>
         </p15:guide>
-        <p15:guide id="2" pos="2880" userDrawn="1">
+        <p15:guide id="2" pos="2822" userDrawn="1">
           <p15:clr>
             <a:srgbClr val="A4A3A4"/>
           </p15:clr>
@@ -621,97 +620,6 @@
           <a:lstStyle/>
           <a:p>
             <a:r>
-              <a:t>[6:55 – 7:25]</a:t>
-            </a:r>
-          </a:p>
-          <a:p>
-            <a:r>
-              <a:t>This is running now, not a mockup.</a:t>
-            </a:r>
-          </a:p>
-          <a:p/>
-          <a:p>
-            <a:r>
-              <a:t>Live verdict feed over server-sent events, which layer stopped what, added</a:t>
-            </a:r>
-          </a:p>
-          <a:p>
-            <a:r>
-              <a:t>latency against a 100ms budget, and a one-click attack that drives the real</a:t>
-            </a:r>
-          </a:p>
-          <a:p>
-            <a:r>
-              <a:t>pipeline — if there's time at the end I'll run it live.</a:t>
-            </a:r>
-          </a:p>
-        </p:txBody>
-      </p:sp>
-      <p:sp>
-        <p:nvSpPr>
-          <p:cNvPr id="4" name="Slide Number Placeholder 3"/>
-          <p:cNvSpPr>
-            <a:spLocks noGrp="1"/>
-          </p:cNvSpPr>
-          <p:nvPr>
-            <p:ph type="sldNum" sz="quarter" idx="5"/>
-          </p:nvPr>
-        </p:nvSpPr>
-        <p:spPr/>
-      </p:sp>
-    </p:spTree>
-  </p:cSld>
-  <p:clrMapOvr>
-    <a:masterClrMapping/>
-  </p:clrMapOvr>
-</p:notes>
-</file>
-
-<file path=ppt/notesSlides/notesSlide11.xml><?xml version="1.0" encoding="utf-8"?>
-<p:notes xmlns:a="http://schemas.openxmlformats.org/drawingml/2006/main" xmlns:r="http://schemas.openxmlformats.org/officeDocument/2006/relationships" xmlns:p="http://schemas.openxmlformats.org/presentationml/2006/main">
-  <p:cSld>
-    <p:spTree>
-      <p:nvGrpSpPr>
-        <p:cNvPr id="1" name=""/>
-        <p:cNvGrpSpPr/>
-        <p:nvPr/>
-      </p:nvGrpSpPr>
-      <p:grpSpPr>
-        <a:xfrm>
-          <a:off x="0" y="0"/>
-          <a:ext cx="0" cy="0"/>
-          <a:chOff x="0" y="0"/>
-          <a:chExt cx="0" cy="0"/>
-        </a:xfrm>
-      </p:grpSpPr>
-      <p:sp>
-        <p:nvSpPr>
-          <p:cNvPr id="2" name="Slide Image Placeholder 1"/>
-          <p:cNvSpPr>
-            <a:spLocks noGrp="1"/>
-          </p:cNvSpPr>
-          <p:nvPr>
-            <p:ph type="sldImg" idx="2"/>
-          </p:nvPr>
-        </p:nvSpPr>
-        <p:spPr/>
-      </p:sp>
-      <p:sp>
-        <p:nvSpPr>
-          <p:cNvPr id="3" name="Notes Placeholder 2"/>
-          <p:cNvSpPr>
-            <a:spLocks noGrp="1"/>
-          </p:cNvSpPr>
-          <p:nvPr>
-            <p:ph type="body" sz="quarter" idx="3"/>
-          </p:nvPr>
-        </p:nvSpPr>
-        <p:spPr/>
-        <p:txBody>
-          <a:bodyPr/>
-          <a:lstStyle/>
-          <a:p>
-            <a:r>
               <a:t>[8:00 – 8:50]</a:t>
             </a:r>
           </a:p>
@@ -1615,34 +1523,28 @@
           <a:lstStyle/>
           <a:p>
             <a:r>
-              <a:t>[5:50 – 6:20]</a:t>
-            </a:r>
-          </a:p>
-          <a:p>
-            <a:r>
-              <a:t>Six stages, four verdicts. Pass, strip, hold, block.</a:t>
+              <a:t>[6:55 – 7:25]</a:t>
+            </a:r>
+          </a:p>
+          <a:p>
+            <a:r>
+              <a:t>This is running now, not a mockup.</a:t>
             </a:r>
           </a:p>
           <a:p/>
           <a:p>
             <a:r>
-              <a:t>The design constraint is that the common case — clean content from a decent</a:t>
-            </a:r>
-          </a:p>
-          <a:p>
-            <a:r>
-              <a:t>source — finishes on the deterministic path without ever calling a model. That</a:t>
-            </a:r>
-          </a:p>
-          <a:p>
-            <a:r>
-              <a:t>is what keeps latency and cost and data exposure down all at once.</a:t>
-            </a:r>
-          </a:p>
-          <a:p/>
-          <a:p>
-            <a:r>
-              <a:t>HOLD is the one that matters: when we're uncertain we don't guess, we ask.</a:t>
+              <a:t>Live verdict feed over server-sent events, which layer stopped what, added</a:t>
+            </a:r>
+          </a:p>
+          <a:p>
+            <a:r>
+              <a:t>latency against a 100ms budget, and a one-click attack that drives the real</a:t>
+            </a:r>
+          </a:p>
+          <a:p>
+            <a:r>
+              <a:t>pipeline — if there's time at the end I'll run it live.</a:t>
             </a:r>
           </a:p>
         </p:txBody>
@@ -5486,7 +5388,7 @@
                 </a:solidFill>
                 <a:latin typeface="Segoe UI" panose="020B0502040204020203"/>
               </a:rPr>
-              <a:t>WORKING SOFTWARE</a:t>
+              <a:t>MEASUREMENT</a:t>
             </a:r>
             <a:endParaRPr sz="800" b="0" spc="260">
               <a:solidFill>
@@ -5531,7 +5433,7 @@
                 </a:solidFill>
                 <a:latin typeface="Bahnschrift SemiBold" panose="020B0502040204020203"/>
               </a:rPr>
-              <a:t>THE LIVE CONSOLE</a:t>
+              <a:t>INJECTBENCH</a:t>
             </a:r>
             <a:endParaRPr sz="3800" b="0" spc="40">
               <a:solidFill>
@@ -5620,7 +5522,7 @@
                 </a:solidFill>
                 <a:latin typeface="Segoe UI" panose="020B0502040204020203"/>
               </a:rPr>
-              <a:t>Every verdict the proxy reaches, streamed as it reaches it — which layer stopped what, added latency against budget, and a one-click attack that drives the real pipeline.</a:t>
+              <a:t>42 categorised attacks across 9 families, 23 benign documents for the false-positive rate, and a reproducible harness — published with the system. All three numbers come from one run.</a:t>
             </a:r>
             <a:endParaRPr sz="1150" b="0">
               <a:solidFill>
@@ -5631,33 +5533,1046 @@
           </a:p>
         </p:txBody>
       </p:sp>
-      <p:pic>
-        <p:nvPicPr>
-          <p:cNvPr id="7" name="Picture 6" descr="01-dashboard.png"/>
-          <p:cNvPicPr>
-            <a:picLocks noChangeAspect="1"/>
-          </p:cNvPicPr>
-          <p:nvPr/>
-        </p:nvPicPr>
-        <p:blipFill>
-          <a:blip r:embed="rId1"/>
-          <a:stretch>
-            <a:fillRect/>
-          </a:stretch>
-        </p:blipFill>
-        <p:spPr>
-          <a:xfrm>
-            <a:off x="807720" y="2516505"/>
-            <a:ext cx="5093970" cy="3657600"/>
-          </a:xfrm>
-          <a:prstGeom prst="rect">
-            <a:avLst/>
-          </a:prstGeom>
-        </p:spPr>
-      </p:pic>
-      <p:sp>
-        <p:nvSpPr>
-          <p:cNvPr id="8" name="TextBox 7"/>
+      <p:sp>
+        <p:nvSpPr>
+          <p:cNvPr id="7" name="Arc 6"/>
+          <p:cNvSpPr/>
+          <p:nvPr/>
+        </p:nvSpPr>
+        <p:spPr>
+          <a:xfrm>
+            <a:off x="1261872" y="2916936"/>
+            <a:ext cx="1225296" cy="1225296"/>
+          </a:xfrm>
+          <a:prstGeom prst="arc">
+            <a:avLst>
+              <a:gd name="adj1" fmla="val -9000000"/>
+              <a:gd name="adj2" fmla="val 26989999"/>
+            </a:avLst>
+          </a:prstGeom>
+          <a:noFill/>
+          <a:ln w="31750">
+            <a:solidFill>
+              <a:srgbClr val="DDDDDA"/>
+            </a:solidFill>
+          </a:ln>
+          <a:effectLst/>
+        </p:spPr>
+        <p:style>
+          <a:lnRef idx="1">
+            <a:schemeClr val="accent1"/>
+          </a:lnRef>
+          <a:fillRef idx="3">
+            <a:schemeClr val="accent1"/>
+          </a:fillRef>
+          <a:effectRef idx="2">
+            <a:schemeClr val="accent1"/>
+          </a:effectRef>
+          <a:fontRef idx="minor">
+            <a:schemeClr val="lt1"/>
+          </a:fontRef>
+        </p:style>
+        <p:txBody>
+          <a:bodyPr rtlCol="0" anchor="ctr"/>
+          <a:lstStyle/>
+          <a:p>
+            <a:pPr algn="ctr"/>
+          </a:p>
+        </p:txBody>
+      </p:sp>
+      <p:sp>
+        <p:nvSpPr>
+          <p:cNvPr id="8" name="Arc 7"/>
+          <p:cNvSpPr/>
+          <p:nvPr/>
+        </p:nvSpPr>
+        <p:spPr>
+          <a:xfrm>
+            <a:off x="1261872" y="2916936"/>
+            <a:ext cx="1225296" cy="1225296"/>
+          </a:xfrm>
+          <a:prstGeom prst="arc">
+            <a:avLst>
+              <a:gd name="adj1" fmla="val -9000000"/>
+              <a:gd name="adj2" fmla="val 27000000"/>
+            </a:avLst>
+          </a:prstGeom>
+          <a:noFill/>
+          <a:ln w="38100">
+            <a:solidFill>
+              <a:srgbClr val="5B52E0"/>
+            </a:solidFill>
+          </a:ln>
+          <a:effectLst/>
+        </p:spPr>
+        <p:style>
+          <a:lnRef idx="1">
+            <a:schemeClr val="accent1"/>
+          </a:lnRef>
+          <a:fillRef idx="3">
+            <a:schemeClr val="accent1"/>
+          </a:fillRef>
+          <a:effectRef idx="2">
+            <a:schemeClr val="accent1"/>
+          </a:effectRef>
+          <a:fontRef idx="minor">
+            <a:schemeClr val="lt1"/>
+          </a:fontRef>
+        </p:style>
+        <p:txBody>
+          <a:bodyPr rtlCol="0" anchor="ctr"/>
+          <a:lstStyle/>
+          <a:p>
+            <a:pPr algn="ctr"/>
+          </a:p>
+        </p:txBody>
+      </p:sp>
+      <p:sp>
+        <p:nvSpPr>
+          <p:cNvPr id="9" name="TextBox 8"/>
+          <p:cNvSpPr txBox="1"/>
+          <p:nvPr/>
+        </p:nvSpPr>
+        <p:spPr>
+          <a:xfrm>
+            <a:off x="1261872" y="3310128"/>
+            <a:ext cx="1225296" cy="402336"/>
+          </a:xfrm>
+          <a:prstGeom prst="rect">
+            <a:avLst/>
+          </a:prstGeom>
+          <a:noFill/>
+        </p:spPr>
+        <p:txBody>
+          <a:bodyPr wrap="square" lIns="0" tIns="0" rIns="0" bIns="0" anchor="t">
+            <a:spAutoFit/>
+          </a:bodyPr>
+          <a:lstStyle/>
+          <a:p>
+            <a:pPr algn="ctr">
+              <a:lnSpc>
+                <a:spcPct val="100000"/>
+              </a:lnSpc>
+            </a:pPr>
+            <a:r>
+              <a:rPr sz="2000" b="0">
+                <a:solidFill>
+                  <a:srgbClr val="111111"/>
+                </a:solidFill>
+                <a:latin typeface="Bahnschrift SemiBold" panose="020B0502040204020203"/>
+              </a:rPr>
+              <a:t>42/42</a:t>
+            </a:r>
+            <a:endParaRPr sz="2000" b="0">
+              <a:solidFill>
+                <a:srgbClr val="111111"/>
+              </a:solidFill>
+              <a:latin typeface="Bahnschrift SemiBold" panose="020B0502040204020203"/>
+            </a:endParaRPr>
+          </a:p>
+        </p:txBody>
+      </p:sp>
+      <p:sp>
+        <p:nvSpPr>
+          <p:cNvPr id="10" name="TextBox 9"/>
+          <p:cNvSpPr txBox="1"/>
+          <p:nvPr/>
+        </p:nvSpPr>
+        <p:spPr>
+          <a:xfrm>
+            <a:off x="804671" y="4288536"/>
+            <a:ext cx="2139696" cy="237744"/>
+          </a:xfrm>
+          <a:prstGeom prst="rect">
+            <a:avLst/>
+          </a:prstGeom>
+          <a:noFill/>
+        </p:spPr>
+        <p:txBody>
+          <a:bodyPr wrap="square" lIns="0" tIns="0" rIns="0" bIns="0" anchor="t">
+            <a:spAutoFit/>
+          </a:bodyPr>
+          <a:lstStyle/>
+          <a:p>
+            <a:pPr algn="ctr">
+              <a:lnSpc>
+                <a:spcPct val="100000"/>
+              </a:lnSpc>
+            </a:pPr>
+            <a:r>
+              <a:rPr sz="800" b="0" spc="200">
+                <a:solidFill>
+                  <a:srgbClr val="A6A6A4"/>
+                </a:solidFill>
+                <a:latin typeface="Segoe UI" panose="020B0502040204020203"/>
+              </a:rPr>
+              <a:t>ATTACK SUCCESS STOPPED</a:t>
+            </a:r>
+            <a:endParaRPr sz="800" b="0" spc="200">
+              <a:solidFill>
+                <a:srgbClr val="A6A6A4"/>
+              </a:solidFill>
+              <a:latin typeface="Segoe UI" panose="020B0502040204020203"/>
+            </a:endParaRPr>
+          </a:p>
+        </p:txBody>
+      </p:sp>
+      <p:sp>
+        <p:nvSpPr>
+          <p:cNvPr id="11" name="Arc 10"/>
+          <p:cNvSpPr/>
+          <p:nvPr/>
+        </p:nvSpPr>
+        <p:spPr>
+          <a:xfrm>
+            <a:off x="4974336" y="2916936"/>
+            <a:ext cx="1225296" cy="1225296"/>
+          </a:xfrm>
+          <a:prstGeom prst="arc">
+            <a:avLst>
+              <a:gd name="adj1" fmla="val -9000000"/>
+              <a:gd name="adj2" fmla="val 26989999"/>
+            </a:avLst>
+          </a:prstGeom>
+          <a:noFill/>
+          <a:ln w="31750">
+            <a:solidFill>
+              <a:srgbClr val="DDDDDA"/>
+            </a:solidFill>
+          </a:ln>
+          <a:effectLst/>
+        </p:spPr>
+        <p:style>
+          <a:lnRef idx="1">
+            <a:schemeClr val="accent1"/>
+          </a:lnRef>
+          <a:fillRef idx="3">
+            <a:schemeClr val="accent1"/>
+          </a:fillRef>
+          <a:effectRef idx="2">
+            <a:schemeClr val="accent1"/>
+          </a:effectRef>
+          <a:fontRef idx="minor">
+            <a:schemeClr val="lt1"/>
+          </a:fontRef>
+        </p:style>
+        <p:txBody>
+          <a:bodyPr rtlCol="0" anchor="ctr"/>
+          <a:lstStyle/>
+          <a:p>
+            <a:pPr algn="ctr"/>
+          </a:p>
+        </p:txBody>
+      </p:sp>
+      <p:sp>
+        <p:nvSpPr>
+          <p:cNvPr id="12" name="Arc 11"/>
+          <p:cNvSpPr/>
+          <p:nvPr/>
+        </p:nvSpPr>
+        <p:spPr>
+          <a:xfrm>
+            <a:off x="4974336" y="2916936"/>
+            <a:ext cx="1225296" cy="1225296"/>
+          </a:xfrm>
+          <a:prstGeom prst="arc">
+            <a:avLst>
+              <a:gd name="adj1" fmla="val -9000000"/>
+              <a:gd name="adj2" fmla="val -8521200"/>
+            </a:avLst>
+          </a:prstGeom>
+          <a:noFill/>
+          <a:ln w="38100">
+            <a:solidFill>
+              <a:srgbClr val="5B52E0"/>
+            </a:solidFill>
+          </a:ln>
+          <a:effectLst/>
+        </p:spPr>
+        <p:style>
+          <a:lnRef idx="1">
+            <a:schemeClr val="accent1"/>
+          </a:lnRef>
+          <a:fillRef idx="3">
+            <a:schemeClr val="accent1"/>
+          </a:fillRef>
+          <a:effectRef idx="2">
+            <a:schemeClr val="accent1"/>
+          </a:effectRef>
+          <a:fontRef idx="minor">
+            <a:schemeClr val="lt1"/>
+          </a:fontRef>
+        </p:style>
+        <p:txBody>
+          <a:bodyPr rtlCol="0" anchor="ctr"/>
+          <a:lstStyle/>
+          <a:p>
+            <a:pPr algn="ctr"/>
+          </a:p>
+        </p:txBody>
+      </p:sp>
+      <p:sp>
+        <p:nvSpPr>
+          <p:cNvPr id="13" name="TextBox 12"/>
+          <p:cNvSpPr txBox="1"/>
+          <p:nvPr/>
+        </p:nvSpPr>
+        <p:spPr>
+          <a:xfrm>
+            <a:off x="4974336" y="3310128"/>
+            <a:ext cx="1225296" cy="402336"/>
+          </a:xfrm>
+          <a:prstGeom prst="rect">
+            <a:avLst/>
+          </a:prstGeom>
+          <a:noFill/>
+        </p:spPr>
+        <p:txBody>
+          <a:bodyPr wrap="square" lIns="0" tIns="0" rIns="0" bIns="0" anchor="t">
+            <a:spAutoFit/>
+          </a:bodyPr>
+          <a:lstStyle/>
+          <a:p>
+            <a:pPr algn="ctr">
+              <a:lnSpc>
+                <a:spcPct val="100000"/>
+              </a:lnSpc>
+            </a:pPr>
+            <a:r>
+              <a:rPr sz="2000" b="0">
+                <a:solidFill>
+                  <a:srgbClr val="111111"/>
+                </a:solidFill>
+                <a:latin typeface="Bahnschrift SemiBold" panose="020B0502040204020203"/>
+              </a:rPr>
+              <a:t>1/75</a:t>
+            </a:r>
+            <a:endParaRPr sz="2000" b="0">
+              <a:solidFill>
+                <a:srgbClr val="111111"/>
+              </a:solidFill>
+              <a:latin typeface="Bahnschrift SemiBold" panose="020B0502040204020203"/>
+            </a:endParaRPr>
+          </a:p>
+        </p:txBody>
+      </p:sp>
+      <p:sp>
+        <p:nvSpPr>
+          <p:cNvPr id="14" name="TextBox 13"/>
+          <p:cNvSpPr txBox="1"/>
+          <p:nvPr/>
+        </p:nvSpPr>
+        <p:spPr>
+          <a:xfrm>
+            <a:off x="4517136" y="4288536"/>
+            <a:ext cx="2139696" cy="237744"/>
+          </a:xfrm>
+          <a:prstGeom prst="rect">
+            <a:avLst/>
+          </a:prstGeom>
+          <a:noFill/>
+        </p:spPr>
+        <p:txBody>
+          <a:bodyPr wrap="square" lIns="0" tIns="0" rIns="0" bIns="0" anchor="t">
+            <a:spAutoFit/>
+          </a:bodyPr>
+          <a:lstStyle/>
+          <a:p>
+            <a:pPr algn="ctr">
+              <a:lnSpc>
+                <a:spcPct val="100000"/>
+              </a:lnSpc>
+            </a:pPr>
+            <a:r>
+              <a:rPr sz="800" b="0" spc="200">
+                <a:solidFill>
+                  <a:srgbClr val="A6A6A4"/>
+                </a:solidFill>
+                <a:latin typeface="Segoe UI" panose="020B0502040204020203"/>
+              </a:rPr>
+              <a:t>BENIGN SPANS QUARANTINED</a:t>
+            </a:r>
+            <a:endParaRPr sz="800" b="0" spc="200">
+              <a:solidFill>
+                <a:srgbClr val="A6A6A4"/>
+              </a:solidFill>
+              <a:latin typeface="Segoe UI" panose="020B0502040204020203"/>
+            </a:endParaRPr>
+          </a:p>
+        </p:txBody>
+      </p:sp>
+      <p:sp>
+        <p:nvSpPr>
+          <p:cNvPr id="15" name="Arc 14"/>
+          <p:cNvSpPr/>
+          <p:nvPr/>
+        </p:nvSpPr>
+        <p:spPr>
+          <a:xfrm>
+            <a:off x="8686800" y="2916936"/>
+            <a:ext cx="1225296" cy="1225296"/>
+          </a:xfrm>
+          <a:prstGeom prst="arc">
+            <a:avLst>
+              <a:gd name="adj1" fmla="val -9000000"/>
+              <a:gd name="adj2" fmla="val 26989999"/>
+            </a:avLst>
+          </a:prstGeom>
+          <a:noFill/>
+          <a:ln w="31750">
+            <a:solidFill>
+              <a:srgbClr val="DDDDDA"/>
+            </a:solidFill>
+          </a:ln>
+          <a:effectLst/>
+        </p:spPr>
+        <p:style>
+          <a:lnRef idx="1">
+            <a:schemeClr val="accent1"/>
+          </a:lnRef>
+          <a:fillRef idx="3">
+            <a:schemeClr val="accent1"/>
+          </a:fillRef>
+          <a:effectRef idx="2">
+            <a:schemeClr val="accent1"/>
+          </a:effectRef>
+          <a:fontRef idx="minor">
+            <a:schemeClr val="lt1"/>
+          </a:fontRef>
+        </p:style>
+        <p:txBody>
+          <a:bodyPr rtlCol="0" anchor="ctr"/>
+          <a:lstStyle/>
+          <a:p>
+            <a:pPr algn="ctr"/>
+          </a:p>
+        </p:txBody>
+      </p:sp>
+      <p:sp>
+        <p:nvSpPr>
+          <p:cNvPr id="16" name="Arc 15"/>
+          <p:cNvSpPr/>
+          <p:nvPr/>
+        </p:nvSpPr>
+        <p:spPr>
+          <a:xfrm>
+            <a:off x="8686800" y="2916936"/>
+            <a:ext cx="1225296" cy="1225296"/>
+          </a:xfrm>
+          <a:prstGeom prst="arc">
+            <a:avLst>
+              <a:gd name="adj1" fmla="val -9000000"/>
+              <a:gd name="adj2" fmla="val 2880000"/>
+            </a:avLst>
+          </a:prstGeom>
+          <a:noFill/>
+          <a:ln w="38100">
+            <a:solidFill>
+              <a:srgbClr val="5B52E0"/>
+            </a:solidFill>
+          </a:ln>
+          <a:effectLst/>
+        </p:spPr>
+        <p:style>
+          <a:lnRef idx="1">
+            <a:schemeClr val="accent1"/>
+          </a:lnRef>
+          <a:fillRef idx="3">
+            <a:schemeClr val="accent1"/>
+          </a:fillRef>
+          <a:effectRef idx="2">
+            <a:schemeClr val="accent1"/>
+          </a:effectRef>
+          <a:fontRef idx="minor">
+            <a:schemeClr val="lt1"/>
+          </a:fontRef>
+        </p:style>
+        <p:txBody>
+          <a:bodyPr rtlCol="0" anchor="ctr"/>
+          <a:lstStyle/>
+          <a:p>
+            <a:pPr algn="ctr"/>
+          </a:p>
+        </p:txBody>
+      </p:sp>
+      <p:sp>
+        <p:nvSpPr>
+          <p:cNvPr id="17" name="TextBox 16"/>
+          <p:cNvSpPr txBox="1"/>
+          <p:nvPr/>
+        </p:nvSpPr>
+        <p:spPr>
+          <a:xfrm>
+            <a:off x="8686800" y="3310128"/>
+            <a:ext cx="1225296" cy="402336"/>
+          </a:xfrm>
+          <a:prstGeom prst="rect">
+            <a:avLst/>
+          </a:prstGeom>
+          <a:noFill/>
+        </p:spPr>
+        <p:txBody>
+          <a:bodyPr wrap="square" lIns="0" tIns="0" rIns="0" bIns="0" anchor="t">
+            <a:spAutoFit/>
+          </a:bodyPr>
+          <a:lstStyle/>
+          <a:p>
+            <a:pPr algn="ctr">
+              <a:lnSpc>
+                <a:spcPct val="100000"/>
+              </a:lnSpc>
+            </a:pPr>
+            <a:r>
+              <a:rPr sz="2000" b="0">
+                <a:solidFill>
+                  <a:srgbClr val="111111"/>
+                </a:solidFill>
+                <a:latin typeface="Bahnschrift SemiBold" panose="020B0502040204020203"/>
+              </a:rPr>
+              <a:t>33/100</a:t>
+            </a:r>
+            <a:endParaRPr sz="2000" b="0">
+              <a:solidFill>
+                <a:srgbClr val="111111"/>
+              </a:solidFill>
+              <a:latin typeface="Bahnschrift SemiBold" panose="020B0502040204020203"/>
+            </a:endParaRPr>
+          </a:p>
+        </p:txBody>
+      </p:sp>
+      <p:sp>
+        <p:nvSpPr>
+          <p:cNvPr id="18" name="TextBox 17"/>
+          <p:cNvSpPr txBox="1"/>
+          <p:nvPr/>
+        </p:nvSpPr>
+        <p:spPr>
+          <a:xfrm>
+            <a:off x="8229600" y="4288536"/>
+            <a:ext cx="2139696" cy="237744"/>
+          </a:xfrm>
+          <a:prstGeom prst="rect">
+            <a:avLst/>
+          </a:prstGeom>
+          <a:noFill/>
+        </p:spPr>
+        <p:txBody>
+          <a:bodyPr wrap="square" lIns="0" tIns="0" rIns="0" bIns="0" anchor="t">
+            <a:spAutoFit/>
+          </a:bodyPr>
+          <a:lstStyle/>
+          <a:p>
+            <a:pPr algn="ctr">
+              <a:lnSpc>
+                <a:spcPct val="100000"/>
+              </a:lnSpc>
+            </a:pPr>
+            <a:r>
+              <a:rPr sz="800" b="0" spc="200">
+                <a:solidFill>
+                  <a:srgbClr val="A6A6A4"/>
+                </a:solidFill>
+                <a:latin typeface="Segoe UI" panose="020B0502040204020203"/>
+              </a:rPr>
+              <a:t>OF THE LATENCY BUDGET</a:t>
+            </a:r>
+            <a:endParaRPr sz="800" b="0" spc="200">
+              <a:solidFill>
+                <a:srgbClr val="A6A6A4"/>
+              </a:solidFill>
+              <a:latin typeface="Segoe UI" panose="020B0502040204020203"/>
+            </a:endParaRPr>
+          </a:p>
+        </p:txBody>
+      </p:sp>
+      <p:sp>
+        <p:nvSpPr>
+          <p:cNvPr id="19" name="TextBox 18"/>
+          <p:cNvSpPr txBox="1"/>
+          <p:nvPr/>
+        </p:nvSpPr>
+        <p:spPr>
+          <a:xfrm>
+            <a:off x="2743200" y="2889504"/>
+            <a:ext cx="2011680" cy="662151"/>
+          </a:xfrm>
+          <a:prstGeom prst="rect">
+            <a:avLst/>
+          </a:prstGeom>
+          <a:noFill/>
+        </p:spPr>
+        <p:txBody>
+          <a:bodyPr wrap="square" lIns="0" tIns="0" rIns="0" bIns="0" anchor="t">
+            <a:spAutoFit/>
+          </a:bodyPr>
+          <a:lstStyle/>
+          <a:p>
+            <a:pPr algn="l">
+              <a:lnSpc>
+                <a:spcPct val="94000"/>
+              </a:lnSpc>
+            </a:pPr>
+            <a:r>
+              <a:rPr sz="4200" b="0" spc="-100">
+                <a:solidFill>
+                  <a:srgbClr val="5B52E0"/>
+                </a:solidFill>
+                <a:latin typeface="Bahnschrift SemiBold" panose="020B0502040204020203"/>
+              </a:rPr>
+              <a:t>100%</a:t>
+            </a:r>
+            <a:endParaRPr sz="4200" b="0" spc="-100">
+              <a:solidFill>
+                <a:srgbClr val="5B52E0"/>
+              </a:solidFill>
+              <a:latin typeface="Bahnschrift SemiBold" panose="020B0502040204020203"/>
+            </a:endParaRPr>
+          </a:p>
+        </p:txBody>
+      </p:sp>
+      <p:sp>
+        <p:nvSpPr>
+          <p:cNvPr id="20" name="TextBox 19"/>
+          <p:cNvSpPr txBox="1"/>
+          <p:nvPr/>
+        </p:nvSpPr>
+        <p:spPr>
+          <a:xfrm>
+            <a:off x="6455664" y="2889504"/>
+            <a:ext cx="2011680" cy="662151"/>
+          </a:xfrm>
+          <a:prstGeom prst="rect">
+            <a:avLst/>
+          </a:prstGeom>
+          <a:noFill/>
+        </p:spPr>
+        <p:txBody>
+          <a:bodyPr wrap="square" lIns="0" tIns="0" rIns="0" bIns="0" anchor="t">
+            <a:spAutoFit/>
+          </a:bodyPr>
+          <a:lstStyle/>
+          <a:p>
+            <a:pPr algn="l">
+              <a:lnSpc>
+                <a:spcPct val="94000"/>
+              </a:lnSpc>
+            </a:pPr>
+            <a:r>
+              <a:rPr sz="4200" b="0" spc="-100">
+                <a:solidFill>
+                  <a:srgbClr val="5B52E0"/>
+                </a:solidFill>
+                <a:latin typeface="Bahnschrift SemiBold" panose="020B0502040204020203"/>
+              </a:rPr>
+              <a:t>1.33%</a:t>
+            </a:r>
+            <a:endParaRPr sz="4200" b="0" spc="-100">
+              <a:solidFill>
+                <a:srgbClr val="5B52E0"/>
+              </a:solidFill>
+              <a:latin typeface="Bahnschrift SemiBold" panose="020B0502040204020203"/>
+            </a:endParaRPr>
+          </a:p>
+        </p:txBody>
+      </p:sp>
+      <p:sp>
+        <p:nvSpPr>
+          <p:cNvPr id="21" name="TextBox 20"/>
+          <p:cNvSpPr txBox="1"/>
+          <p:nvPr/>
+        </p:nvSpPr>
+        <p:spPr>
+          <a:xfrm>
+            <a:off x="10168128" y="2889504"/>
+            <a:ext cx="2011680" cy="662151"/>
+          </a:xfrm>
+          <a:prstGeom prst="rect">
+            <a:avLst/>
+          </a:prstGeom>
+          <a:noFill/>
+        </p:spPr>
+        <p:txBody>
+          <a:bodyPr wrap="square" lIns="0" tIns="0" rIns="0" bIns="0" anchor="t">
+            <a:spAutoFit/>
+          </a:bodyPr>
+          <a:lstStyle/>
+          <a:p>
+            <a:pPr algn="l">
+              <a:lnSpc>
+                <a:spcPct val="94000"/>
+              </a:lnSpc>
+            </a:pPr>
+            <a:r>
+              <a:rPr sz="4200" b="0" spc="-100">
+                <a:solidFill>
+                  <a:srgbClr val="5B52E0"/>
+                </a:solidFill>
+                <a:latin typeface="Bahnschrift SemiBold" panose="020B0502040204020203"/>
+              </a:rPr>
+              <a:t>33ms</a:t>
+            </a:r>
+            <a:endParaRPr sz="4200" b="0" spc="-100">
+              <a:solidFill>
+                <a:srgbClr val="5B52E0"/>
+              </a:solidFill>
+              <a:latin typeface="Bahnschrift SemiBold" panose="020B0502040204020203"/>
+            </a:endParaRPr>
+          </a:p>
+        </p:txBody>
+      </p:sp>
+      <p:sp>
+        <p:nvSpPr>
+          <p:cNvPr id="22" name="TextBox 21"/>
+          <p:cNvSpPr txBox="1"/>
+          <p:nvPr/>
+        </p:nvSpPr>
+        <p:spPr>
+          <a:xfrm>
+            <a:off x="960120" y="4590288"/>
+            <a:ext cx="3108960" cy="365760"/>
+          </a:xfrm>
+          <a:prstGeom prst="rect">
+            <a:avLst/>
+          </a:prstGeom>
+          <a:noFill/>
+        </p:spPr>
+        <p:txBody>
+          <a:bodyPr wrap="square" lIns="0" tIns="0" rIns="0" bIns="0" anchor="t">
+            <a:spAutoFit/>
+          </a:bodyPr>
+          <a:lstStyle/>
+          <a:p>
+            <a:pPr algn="l">
+              <a:lnSpc>
+                <a:spcPct val="145000"/>
+              </a:lnSpc>
+            </a:pPr>
+            <a:r>
+              <a:rPr sz="950" b="0">
+                <a:solidFill>
+                  <a:srgbClr val="777777"/>
+                </a:solidFill>
+                <a:latin typeface="Segoe UI" panose="020B0502040204020203"/>
+              </a:rPr>
+              <a:t>42 of 42 unprotected → 0 of 42 protected · target ≥ 90%</a:t>
+            </a:r>
+            <a:endParaRPr sz="950" b="0">
+              <a:solidFill>
+                <a:srgbClr val="777777"/>
+              </a:solidFill>
+              <a:latin typeface="Segoe UI" panose="020B0502040204020203"/>
+            </a:endParaRPr>
+          </a:p>
+        </p:txBody>
+      </p:sp>
+      <p:sp>
+        <p:nvSpPr>
+          <p:cNvPr id="23" name="TextBox 22"/>
+          <p:cNvSpPr txBox="1"/>
+          <p:nvPr/>
+        </p:nvSpPr>
+        <p:spPr>
+          <a:xfrm>
+            <a:off x="4672583" y="4590288"/>
+            <a:ext cx="3108960" cy="365760"/>
+          </a:xfrm>
+          <a:prstGeom prst="rect">
+            <a:avLst/>
+          </a:prstGeom>
+          <a:noFill/>
+        </p:spPr>
+        <p:txBody>
+          <a:bodyPr wrap="square" lIns="0" tIns="0" rIns="0" bIns="0" anchor="t">
+            <a:spAutoFit/>
+          </a:bodyPr>
+          <a:lstStyle/>
+          <a:p>
+            <a:pPr algn="l">
+              <a:lnSpc>
+                <a:spcPct val="145000"/>
+              </a:lnSpc>
+            </a:pPr>
+            <a:r>
+              <a:rPr sz="950" b="0">
+                <a:solidFill>
+                  <a:srgbClr val="777777"/>
+                </a:solidFill>
+                <a:latin typeface="Segoe UI" panose="020B0502040204020203"/>
+              </a:rPr>
+              <a:t>1 of 75 spans, measured per span · target &lt; 2%</a:t>
+            </a:r>
+            <a:endParaRPr sz="950" b="0">
+              <a:solidFill>
+                <a:srgbClr val="777777"/>
+              </a:solidFill>
+              <a:latin typeface="Segoe UI" panose="020B0502040204020203"/>
+            </a:endParaRPr>
+          </a:p>
+        </p:txBody>
+      </p:sp>
+      <p:sp>
+        <p:nvSpPr>
+          <p:cNvPr id="24" name="TextBox 23"/>
+          <p:cNvSpPr txBox="1"/>
+          <p:nvPr/>
+        </p:nvSpPr>
+        <p:spPr>
+          <a:xfrm>
+            <a:off x="8385048" y="4590288"/>
+            <a:ext cx="3108960" cy="365760"/>
+          </a:xfrm>
+          <a:prstGeom prst="rect">
+            <a:avLst/>
+          </a:prstGeom>
+          <a:noFill/>
+        </p:spPr>
+        <p:txBody>
+          <a:bodyPr wrap="square" lIns="0" tIns="0" rIns="0" bIns="0" anchor="t">
+            <a:spAutoFit/>
+          </a:bodyPr>
+          <a:lstStyle/>
+          <a:p>
+            <a:pPr algn="l">
+              <a:lnSpc>
+                <a:spcPct val="145000"/>
+              </a:lnSpc>
+            </a:pPr>
+            <a:r>
+              <a:rPr sz="950" b="0">
+                <a:solidFill>
+                  <a:srgbClr val="777777"/>
+                </a:solidFill>
+                <a:latin typeface="Segoe UI" panose="020B0502040204020203"/>
+              </a:rPr>
+              <a:t>deterministic path, no model call · target &lt; 100 ms</a:t>
+            </a:r>
+            <a:endParaRPr sz="950" b="0">
+              <a:solidFill>
+                <a:srgbClr val="777777"/>
+              </a:solidFill>
+              <a:latin typeface="Segoe UI" panose="020B0502040204020203"/>
+            </a:endParaRPr>
+          </a:p>
+        </p:txBody>
+      </p:sp>
+      <p:sp>
+        <p:nvSpPr>
+          <p:cNvPr id="25" name="Rectangle 24"/>
+          <p:cNvSpPr/>
+          <p:nvPr/>
+        </p:nvSpPr>
+        <p:spPr>
+          <a:xfrm>
+            <a:off x="914400" y="5193792"/>
+            <a:ext cx="10362895" cy="10972"/>
+          </a:xfrm>
+          <a:prstGeom prst="rect">
+            <a:avLst/>
+          </a:prstGeom>
+          <a:solidFill>
+            <a:srgbClr val="DDDDDA"/>
+          </a:solidFill>
+          <a:ln>
+            <a:noFill/>
+          </a:ln>
+          <a:effectLst/>
+        </p:spPr>
+        <p:style>
+          <a:lnRef idx="1">
+            <a:schemeClr val="accent1"/>
+          </a:lnRef>
+          <a:fillRef idx="3">
+            <a:schemeClr val="accent1"/>
+          </a:fillRef>
+          <a:effectRef idx="2">
+            <a:schemeClr val="accent1"/>
+          </a:effectRef>
+          <a:fontRef idx="minor">
+            <a:schemeClr val="lt1"/>
+          </a:fontRef>
+        </p:style>
+        <p:txBody>
+          <a:bodyPr wrap="square" rtlCol="0" anchor="ctr"/>
+          <a:lstStyle/>
+          <a:p>
+            <a:pPr algn="ctr"/>
+          </a:p>
+        </p:txBody>
+      </p:sp>
+      <p:sp>
+        <p:nvSpPr>
+          <p:cNvPr id="26" name="TextBox 25"/>
+          <p:cNvSpPr txBox="1"/>
+          <p:nvPr/>
+        </p:nvSpPr>
+        <p:spPr>
+          <a:xfrm>
+            <a:off x="914400" y="5394960"/>
+            <a:ext cx="5486400" cy="219456"/>
+          </a:xfrm>
+          <a:prstGeom prst="rect">
+            <a:avLst/>
+          </a:prstGeom>
+          <a:noFill/>
+        </p:spPr>
+        <p:txBody>
+          <a:bodyPr wrap="square" lIns="0" tIns="0" rIns="0" bIns="0" anchor="t">
+            <a:spAutoFit/>
+          </a:bodyPr>
+          <a:lstStyle/>
+          <a:p>
+            <a:pPr algn="l">
+              <a:lnSpc>
+                <a:spcPct val="100000"/>
+              </a:lnSpc>
+            </a:pPr>
+            <a:r>
+              <a:rPr sz="800" b="0" spc="260">
+                <a:solidFill>
+                  <a:srgbClr val="5B52E0"/>
+                </a:solidFill>
+                <a:latin typeface="Segoe UI" panose="020B0502040204020203"/>
+              </a:rPr>
+              <a:t>REPORTED HONESTLY</a:t>
+            </a:r>
+            <a:endParaRPr sz="800" b="0" spc="260">
+              <a:solidFill>
+                <a:srgbClr val="5B52E0"/>
+              </a:solidFill>
+              <a:latin typeface="Segoe UI" panose="020B0502040204020203"/>
+            </a:endParaRPr>
+          </a:p>
+        </p:txBody>
+      </p:sp>
+      <p:sp>
+        <p:nvSpPr>
+          <p:cNvPr id="27" name="TextBox 26"/>
+          <p:cNvSpPr txBox="1"/>
+          <p:nvPr/>
+        </p:nvSpPr>
+        <p:spPr>
+          <a:xfrm>
+            <a:off x="914400" y="5669280"/>
+            <a:ext cx="10362895" cy="257810"/>
+          </a:xfrm>
+          <a:prstGeom prst="rect">
+            <a:avLst/>
+          </a:prstGeom>
+          <a:noFill/>
+        </p:spPr>
+        <p:txBody>
+          <a:bodyPr wrap="square" lIns="0" tIns="0" rIns="0" bIns="0">
+            <a:spAutoFit/>
+          </a:bodyPr>
+          <a:lstStyle/>
+          <a:p>
+            <a:pPr>
+              <a:lnSpc>
+                <a:spcPct val="160000"/>
+              </a:lnSpc>
+            </a:pPr>
+            <a:r>
+              <a:rPr sz="1050" b="0">
+                <a:solidFill>
+                  <a:srgbClr val="111111"/>
+                </a:solidFill>
+                <a:latin typeface="Segoe UI" panose="020B0502040204020203"/>
+              </a:rPr>
+              <a:t>The unprotected baseline reproduces all 42 attacks</a:t>
+            </a:r>
+            <a:r>
+              <a:rPr lang="en-US" sz="1050" b="0">
+                <a:solidFill>
+                  <a:srgbClr val="111111"/>
+                </a:solidFill>
+                <a:latin typeface="Segoe UI" panose="020B0502040204020203"/>
+              </a:rPr>
+              <a:t>:</a:t>
+            </a:r>
+            <a:r>
+              <a:rPr sz="1050" b="0">
+                <a:solidFill>
+                  <a:srgbClr val="111111"/>
+                </a:solidFill>
+                <a:latin typeface="Segoe UI" panose="020B0502040204020203"/>
+              </a:rPr>
+              <a:t> </a:t>
+            </a:r>
+            <a:r>
+              <a:rPr sz="1050">
+                <a:solidFill>
+                  <a:srgbClr val="444444"/>
+                </a:solidFill>
+                <a:latin typeface="Segoe UI" panose="020B0502040204020203"/>
+              </a:rPr>
+              <a:t>a defence cannot take credit for an attack that never worked.</a:t>
+            </a:r>
+            <a:endParaRPr sz="1050">
+              <a:solidFill>
+                <a:srgbClr val="444444"/>
+              </a:solidFill>
+              <a:latin typeface="Segoe UI" panose="020B0502040204020203"/>
+            </a:endParaRPr>
+          </a:p>
+        </p:txBody>
+      </p:sp>
+      <p:sp>
+        <p:nvSpPr>
+          <p:cNvPr id="28" name="TextBox 27"/>
+          <p:cNvSpPr txBox="1"/>
+          <p:nvPr/>
+        </p:nvSpPr>
+        <p:spPr>
+          <a:xfrm>
+            <a:off x="914400" y="5998464"/>
+            <a:ext cx="10362895" cy="365760"/>
+          </a:xfrm>
+          <a:prstGeom prst="rect">
+            <a:avLst/>
+          </a:prstGeom>
+          <a:noFill/>
+        </p:spPr>
+        <p:txBody>
+          <a:bodyPr wrap="square" lIns="0" tIns="0" rIns="0" bIns="0">
+            <a:spAutoFit/>
+          </a:bodyPr>
+          <a:lstStyle/>
+          <a:p>
+            <a:pPr>
+              <a:lnSpc>
+                <a:spcPct val="160000"/>
+              </a:lnSpc>
+            </a:pPr>
+            <a:r>
+              <a:rPr sz="1050" b="0">
+                <a:solidFill>
+                  <a:srgbClr val="111111"/>
+                </a:solidFill>
+                <a:latin typeface="Segoe UI" panose="020B0502040204020203"/>
+              </a:rPr>
+              <a:t>The single false positive is a security article quoting a payload — </a:t>
+            </a:r>
+            <a:r>
+              <a:rPr sz="1050">
+                <a:solidFill>
+                  <a:srgbClr val="444444"/>
+                </a:solidFill>
+                <a:latin typeface="Segoe UI" panose="020B0502040204020203"/>
+              </a:rPr>
+              <a:t>it stays in the corpus and we report it.</a:t>
+            </a:r>
+            <a:endParaRPr sz="1050">
+              <a:solidFill>
+                <a:srgbClr val="444444"/>
+              </a:solidFill>
+              <a:latin typeface="Segoe UI" panose="020B0502040204020203"/>
+            </a:endParaRPr>
+          </a:p>
+        </p:txBody>
+      </p:sp>
+      <p:sp>
+        <p:nvSpPr>
+          <p:cNvPr id="29" name="TextBox 28"/>
           <p:cNvSpPr txBox="1"/>
           <p:nvPr/>
         </p:nvSpPr>
@@ -5700,30 +6615,6 @@
           </a:p>
         </p:txBody>
       </p:sp>
-      <p:pic>
-        <p:nvPicPr>
-          <p:cNvPr id="10" name="Picture 9" descr="02-held-action.png"/>
-          <p:cNvPicPr>
-            <a:picLocks noChangeAspect="1"/>
-          </p:cNvPicPr>
-          <p:nvPr/>
-        </p:nvPicPr>
-        <p:blipFill>
-          <a:blip r:embed="rId2"/>
-          <a:stretch>
-            <a:fillRect/>
-          </a:stretch>
-        </p:blipFill>
-        <p:spPr>
-          <a:xfrm>
-            <a:off x="6101715" y="2543810"/>
-            <a:ext cx="5647690" cy="3773170"/>
-          </a:xfrm>
-          <a:prstGeom prst="rect">
-            <a:avLst/>
-          </a:prstGeom>
-        </p:spPr>
-      </p:pic>
     </p:spTree>
   </p:cSld>
   <p:clrMapOvr>
@@ -5744,1329 +6635,6 @@
       <p:grpSpPr/>
       <p:sp>
         <p:nvSpPr>
-          <p:cNvPr id="2" name="Rectangle 1"/>
-          <p:cNvSpPr/>
-          <p:nvPr/>
-        </p:nvSpPr>
-        <p:spPr>
-          <a:xfrm>
-            <a:off x="0" y="0"/>
-            <a:ext cx="12191695" cy="6858000"/>
-          </a:xfrm>
-          <a:prstGeom prst="rect">
-            <a:avLst/>
-          </a:prstGeom>
-          <a:solidFill>
-            <a:srgbClr val="F7F7F5"/>
-          </a:solidFill>
-          <a:ln>
-            <a:noFill/>
-          </a:ln>
-          <a:effectLst/>
-        </p:spPr>
-        <p:style>
-          <a:lnRef idx="1">
-            <a:schemeClr val="accent1"/>
-          </a:lnRef>
-          <a:fillRef idx="3">
-            <a:schemeClr val="accent1"/>
-          </a:fillRef>
-          <a:effectRef idx="2">
-            <a:schemeClr val="accent1"/>
-          </a:effectRef>
-          <a:fontRef idx="minor">
-            <a:schemeClr val="lt1"/>
-          </a:fontRef>
-        </p:style>
-        <p:txBody>
-          <a:bodyPr wrap="square" rtlCol="0" anchor="ctr"/>
-          <a:lstStyle/>
-          <a:p>
-            <a:pPr algn="ctr"/>
-          </a:p>
-        </p:txBody>
-      </p:sp>
-      <p:sp>
-        <p:nvSpPr>
-          <p:cNvPr id="3" name="TextBox 2"/>
-          <p:cNvSpPr txBox="1"/>
-          <p:nvPr/>
-        </p:nvSpPr>
-        <p:spPr>
-          <a:xfrm>
-            <a:off x="914400" y="786384"/>
-            <a:ext cx="5486400" cy="219456"/>
-          </a:xfrm>
-          <a:prstGeom prst="rect">
-            <a:avLst/>
-          </a:prstGeom>
-          <a:noFill/>
-        </p:spPr>
-        <p:txBody>
-          <a:bodyPr wrap="square" lIns="0" tIns="0" rIns="0" bIns="0" anchor="t">
-            <a:spAutoFit/>
-          </a:bodyPr>
-          <a:lstStyle/>
-          <a:p>
-            <a:pPr algn="l">
-              <a:lnSpc>
-                <a:spcPct val="100000"/>
-              </a:lnSpc>
-            </a:pPr>
-            <a:r>
-              <a:rPr sz="800" b="0" spc="260">
-                <a:solidFill>
-                  <a:srgbClr val="5B52E0"/>
-                </a:solidFill>
-                <a:latin typeface="Segoe UI" panose="020B0502040204020203"/>
-              </a:rPr>
-              <a:t>MEASUREMENT</a:t>
-            </a:r>
-            <a:endParaRPr sz="800" b="0" spc="260">
-              <a:solidFill>
-                <a:srgbClr val="5B52E0"/>
-              </a:solidFill>
-              <a:latin typeface="Segoe UI" panose="020B0502040204020203"/>
-            </a:endParaRPr>
-          </a:p>
-        </p:txBody>
-      </p:sp>
-      <p:sp>
-        <p:nvSpPr>
-          <p:cNvPr id="4" name="TextBox 3"/>
-          <p:cNvSpPr txBox="1"/>
-          <p:nvPr/>
-        </p:nvSpPr>
-        <p:spPr>
-          <a:xfrm>
-            <a:off x="914400" y="1060704"/>
-            <a:ext cx="10424160" cy="668215"/>
-          </a:xfrm>
-          <a:prstGeom prst="rect">
-            <a:avLst/>
-          </a:prstGeom>
-          <a:noFill/>
-        </p:spPr>
-        <p:txBody>
-          <a:bodyPr wrap="square" lIns="0" tIns="0" rIns="0" bIns="0" anchor="t">
-            <a:spAutoFit/>
-          </a:bodyPr>
-          <a:lstStyle/>
-          <a:p>
-            <a:pPr algn="l">
-              <a:lnSpc>
-                <a:spcPct val="102000"/>
-              </a:lnSpc>
-            </a:pPr>
-            <a:r>
-              <a:rPr sz="3800" b="0" spc="40">
-                <a:solidFill>
-                  <a:srgbClr val="111111"/>
-                </a:solidFill>
-                <a:latin typeface="Bahnschrift SemiBold" panose="020B0502040204020203"/>
-              </a:rPr>
-              <a:t>INJECTBENCH</a:t>
-            </a:r>
-            <a:endParaRPr sz="3800" b="0" spc="40">
-              <a:solidFill>
-                <a:srgbClr val="111111"/>
-              </a:solidFill>
-              <a:latin typeface="Bahnschrift SemiBold" panose="020B0502040204020203"/>
-            </a:endParaRPr>
-          </a:p>
-        </p:txBody>
-      </p:sp>
-      <p:sp>
-        <p:nvSpPr>
-          <p:cNvPr id="5" name="Rectangle 4"/>
-          <p:cNvSpPr/>
-          <p:nvPr/>
-        </p:nvSpPr>
-        <p:spPr>
-          <a:xfrm>
-            <a:off x="914400" y="1755648"/>
-            <a:ext cx="10362895" cy="10972"/>
-          </a:xfrm>
-          <a:prstGeom prst="rect">
-            <a:avLst/>
-          </a:prstGeom>
-          <a:solidFill>
-            <a:srgbClr val="DDDDDA"/>
-          </a:solidFill>
-          <a:ln>
-            <a:noFill/>
-          </a:ln>
-          <a:effectLst/>
-        </p:spPr>
-        <p:style>
-          <a:lnRef idx="1">
-            <a:schemeClr val="accent1"/>
-          </a:lnRef>
-          <a:fillRef idx="3">
-            <a:schemeClr val="accent1"/>
-          </a:fillRef>
-          <a:effectRef idx="2">
-            <a:schemeClr val="accent1"/>
-          </a:effectRef>
-          <a:fontRef idx="minor">
-            <a:schemeClr val="lt1"/>
-          </a:fontRef>
-        </p:style>
-        <p:txBody>
-          <a:bodyPr wrap="square" rtlCol="0" anchor="ctr"/>
-          <a:lstStyle/>
-          <a:p>
-            <a:pPr algn="ctr"/>
-          </a:p>
-        </p:txBody>
-      </p:sp>
-      <p:sp>
-        <p:nvSpPr>
-          <p:cNvPr id="6" name="TextBox 5"/>
-          <p:cNvSpPr txBox="1"/>
-          <p:nvPr/>
-        </p:nvSpPr>
-        <p:spPr>
-          <a:xfrm>
-            <a:off x="914400" y="1938528"/>
-            <a:ext cx="6949440" cy="548640"/>
-          </a:xfrm>
-          <a:prstGeom prst="rect">
-            <a:avLst/>
-          </a:prstGeom>
-          <a:noFill/>
-        </p:spPr>
-        <p:txBody>
-          <a:bodyPr wrap="square" lIns="0" tIns="0" rIns="0" bIns="0" anchor="t">
-            <a:spAutoFit/>
-          </a:bodyPr>
-          <a:lstStyle/>
-          <a:p>
-            <a:pPr algn="l">
-              <a:lnSpc>
-                <a:spcPct val="162000"/>
-              </a:lnSpc>
-            </a:pPr>
-            <a:r>
-              <a:rPr sz="1150" b="0">
-                <a:solidFill>
-                  <a:srgbClr val="777777"/>
-                </a:solidFill>
-                <a:latin typeface="Segoe UI" panose="020B0502040204020203"/>
-              </a:rPr>
-              <a:t>42 categorised attacks across 9 families, 23 benign documents for the false-positive rate, and a reproducible harness — published with the system. All three numbers come from one run.</a:t>
-            </a:r>
-            <a:endParaRPr sz="1150" b="0">
-              <a:solidFill>
-                <a:srgbClr val="777777"/>
-              </a:solidFill>
-              <a:latin typeface="Segoe UI" panose="020B0502040204020203"/>
-            </a:endParaRPr>
-          </a:p>
-        </p:txBody>
-      </p:sp>
-      <p:sp>
-        <p:nvSpPr>
-          <p:cNvPr id="7" name="Arc 6"/>
-          <p:cNvSpPr/>
-          <p:nvPr/>
-        </p:nvSpPr>
-        <p:spPr>
-          <a:xfrm>
-            <a:off x="1261872" y="2916936"/>
-            <a:ext cx="1225296" cy="1225296"/>
-          </a:xfrm>
-          <a:prstGeom prst="arc">
-            <a:avLst>
-              <a:gd name="adj1" fmla="val -9000000"/>
-              <a:gd name="adj2" fmla="val 26989999"/>
-            </a:avLst>
-          </a:prstGeom>
-          <a:noFill/>
-          <a:ln w="31750">
-            <a:solidFill>
-              <a:srgbClr val="DDDDDA"/>
-            </a:solidFill>
-          </a:ln>
-          <a:effectLst/>
-        </p:spPr>
-        <p:style>
-          <a:lnRef idx="1">
-            <a:schemeClr val="accent1"/>
-          </a:lnRef>
-          <a:fillRef idx="3">
-            <a:schemeClr val="accent1"/>
-          </a:fillRef>
-          <a:effectRef idx="2">
-            <a:schemeClr val="accent1"/>
-          </a:effectRef>
-          <a:fontRef idx="minor">
-            <a:schemeClr val="lt1"/>
-          </a:fontRef>
-        </p:style>
-        <p:txBody>
-          <a:bodyPr rtlCol="0" anchor="ctr"/>
-          <a:lstStyle/>
-          <a:p>
-            <a:pPr algn="ctr"/>
-          </a:p>
-        </p:txBody>
-      </p:sp>
-      <p:sp>
-        <p:nvSpPr>
-          <p:cNvPr id="8" name="Arc 7"/>
-          <p:cNvSpPr/>
-          <p:nvPr/>
-        </p:nvSpPr>
-        <p:spPr>
-          <a:xfrm>
-            <a:off x="1261872" y="2916936"/>
-            <a:ext cx="1225296" cy="1225296"/>
-          </a:xfrm>
-          <a:prstGeom prst="arc">
-            <a:avLst>
-              <a:gd name="adj1" fmla="val -9000000"/>
-              <a:gd name="adj2" fmla="val 27000000"/>
-            </a:avLst>
-          </a:prstGeom>
-          <a:noFill/>
-          <a:ln w="38100">
-            <a:solidFill>
-              <a:srgbClr val="5B52E0"/>
-            </a:solidFill>
-          </a:ln>
-          <a:effectLst/>
-        </p:spPr>
-        <p:style>
-          <a:lnRef idx="1">
-            <a:schemeClr val="accent1"/>
-          </a:lnRef>
-          <a:fillRef idx="3">
-            <a:schemeClr val="accent1"/>
-          </a:fillRef>
-          <a:effectRef idx="2">
-            <a:schemeClr val="accent1"/>
-          </a:effectRef>
-          <a:fontRef idx="minor">
-            <a:schemeClr val="lt1"/>
-          </a:fontRef>
-        </p:style>
-        <p:txBody>
-          <a:bodyPr rtlCol="0" anchor="ctr"/>
-          <a:lstStyle/>
-          <a:p>
-            <a:pPr algn="ctr"/>
-          </a:p>
-        </p:txBody>
-      </p:sp>
-      <p:sp>
-        <p:nvSpPr>
-          <p:cNvPr id="9" name="TextBox 8"/>
-          <p:cNvSpPr txBox="1"/>
-          <p:nvPr/>
-        </p:nvSpPr>
-        <p:spPr>
-          <a:xfrm>
-            <a:off x="1261872" y="3310128"/>
-            <a:ext cx="1225296" cy="402336"/>
-          </a:xfrm>
-          <a:prstGeom prst="rect">
-            <a:avLst/>
-          </a:prstGeom>
-          <a:noFill/>
-        </p:spPr>
-        <p:txBody>
-          <a:bodyPr wrap="square" lIns="0" tIns="0" rIns="0" bIns="0" anchor="t">
-            <a:spAutoFit/>
-          </a:bodyPr>
-          <a:lstStyle/>
-          <a:p>
-            <a:pPr algn="ctr">
-              <a:lnSpc>
-                <a:spcPct val="100000"/>
-              </a:lnSpc>
-            </a:pPr>
-            <a:r>
-              <a:rPr sz="2000" b="0">
-                <a:solidFill>
-                  <a:srgbClr val="111111"/>
-                </a:solidFill>
-                <a:latin typeface="Bahnschrift SemiBold" panose="020B0502040204020203"/>
-              </a:rPr>
-              <a:t>42/42</a:t>
-            </a:r>
-            <a:endParaRPr sz="2000" b="0">
-              <a:solidFill>
-                <a:srgbClr val="111111"/>
-              </a:solidFill>
-              <a:latin typeface="Bahnschrift SemiBold" panose="020B0502040204020203"/>
-            </a:endParaRPr>
-          </a:p>
-        </p:txBody>
-      </p:sp>
-      <p:sp>
-        <p:nvSpPr>
-          <p:cNvPr id="10" name="TextBox 9"/>
-          <p:cNvSpPr txBox="1"/>
-          <p:nvPr/>
-        </p:nvSpPr>
-        <p:spPr>
-          <a:xfrm>
-            <a:off x="804671" y="4288536"/>
-            <a:ext cx="2139696" cy="237744"/>
-          </a:xfrm>
-          <a:prstGeom prst="rect">
-            <a:avLst/>
-          </a:prstGeom>
-          <a:noFill/>
-        </p:spPr>
-        <p:txBody>
-          <a:bodyPr wrap="square" lIns="0" tIns="0" rIns="0" bIns="0" anchor="t">
-            <a:spAutoFit/>
-          </a:bodyPr>
-          <a:lstStyle/>
-          <a:p>
-            <a:pPr algn="ctr">
-              <a:lnSpc>
-                <a:spcPct val="100000"/>
-              </a:lnSpc>
-            </a:pPr>
-            <a:r>
-              <a:rPr sz="800" b="0" spc="200">
-                <a:solidFill>
-                  <a:srgbClr val="A6A6A4"/>
-                </a:solidFill>
-                <a:latin typeface="Segoe UI" panose="020B0502040204020203"/>
-              </a:rPr>
-              <a:t>ATTACK SUCCESS STOPPED</a:t>
-            </a:r>
-            <a:endParaRPr sz="800" b="0" spc="200">
-              <a:solidFill>
-                <a:srgbClr val="A6A6A4"/>
-              </a:solidFill>
-              <a:latin typeface="Segoe UI" panose="020B0502040204020203"/>
-            </a:endParaRPr>
-          </a:p>
-        </p:txBody>
-      </p:sp>
-      <p:sp>
-        <p:nvSpPr>
-          <p:cNvPr id="11" name="Arc 10"/>
-          <p:cNvSpPr/>
-          <p:nvPr/>
-        </p:nvSpPr>
-        <p:spPr>
-          <a:xfrm>
-            <a:off x="4974336" y="2916936"/>
-            <a:ext cx="1225296" cy="1225296"/>
-          </a:xfrm>
-          <a:prstGeom prst="arc">
-            <a:avLst>
-              <a:gd name="adj1" fmla="val -9000000"/>
-              <a:gd name="adj2" fmla="val 26989999"/>
-            </a:avLst>
-          </a:prstGeom>
-          <a:noFill/>
-          <a:ln w="31750">
-            <a:solidFill>
-              <a:srgbClr val="DDDDDA"/>
-            </a:solidFill>
-          </a:ln>
-          <a:effectLst/>
-        </p:spPr>
-        <p:style>
-          <a:lnRef idx="1">
-            <a:schemeClr val="accent1"/>
-          </a:lnRef>
-          <a:fillRef idx="3">
-            <a:schemeClr val="accent1"/>
-          </a:fillRef>
-          <a:effectRef idx="2">
-            <a:schemeClr val="accent1"/>
-          </a:effectRef>
-          <a:fontRef idx="minor">
-            <a:schemeClr val="lt1"/>
-          </a:fontRef>
-        </p:style>
-        <p:txBody>
-          <a:bodyPr rtlCol="0" anchor="ctr"/>
-          <a:lstStyle/>
-          <a:p>
-            <a:pPr algn="ctr"/>
-          </a:p>
-        </p:txBody>
-      </p:sp>
-      <p:sp>
-        <p:nvSpPr>
-          <p:cNvPr id="12" name="Arc 11"/>
-          <p:cNvSpPr/>
-          <p:nvPr/>
-        </p:nvSpPr>
-        <p:spPr>
-          <a:xfrm>
-            <a:off x="4974336" y="2916936"/>
-            <a:ext cx="1225296" cy="1225296"/>
-          </a:xfrm>
-          <a:prstGeom prst="arc">
-            <a:avLst>
-              <a:gd name="adj1" fmla="val -9000000"/>
-              <a:gd name="adj2" fmla="val -8521200"/>
-            </a:avLst>
-          </a:prstGeom>
-          <a:noFill/>
-          <a:ln w="38100">
-            <a:solidFill>
-              <a:srgbClr val="5B52E0"/>
-            </a:solidFill>
-          </a:ln>
-          <a:effectLst/>
-        </p:spPr>
-        <p:style>
-          <a:lnRef idx="1">
-            <a:schemeClr val="accent1"/>
-          </a:lnRef>
-          <a:fillRef idx="3">
-            <a:schemeClr val="accent1"/>
-          </a:fillRef>
-          <a:effectRef idx="2">
-            <a:schemeClr val="accent1"/>
-          </a:effectRef>
-          <a:fontRef idx="minor">
-            <a:schemeClr val="lt1"/>
-          </a:fontRef>
-        </p:style>
-        <p:txBody>
-          <a:bodyPr rtlCol="0" anchor="ctr"/>
-          <a:lstStyle/>
-          <a:p>
-            <a:pPr algn="ctr"/>
-          </a:p>
-        </p:txBody>
-      </p:sp>
-      <p:sp>
-        <p:nvSpPr>
-          <p:cNvPr id="13" name="TextBox 12"/>
-          <p:cNvSpPr txBox="1"/>
-          <p:nvPr/>
-        </p:nvSpPr>
-        <p:spPr>
-          <a:xfrm>
-            <a:off x="4974336" y="3310128"/>
-            <a:ext cx="1225296" cy="402336"/>
-          </a:xfrm>
-          <a:prstGeom prst="rect">
-            <a:avLst/>
-          </a:prstGeom>
-          <a:noFill/>
-        </p:spPr>
-        <p:txBody>
-          <a:bodyPr wrap="square" lIns="0" tIns="0" rIns="0" bIns="0" anchor="t">
-            <a:spAutoFit/>
-          </a:bodyPr>
-          <a:lstStyle/>
-          <a:p>
-            <a:pPr algn="ctr">
-              <a:lnSpc>
-                <a:spcPct val="100000"/>
-              </a:lnSpc>
-            </a:pPr>
-            <a:r>
-              <a:rPr sz="2000" b="0">
-                <a:solidFill>
-                  <a:srgbClr val="111111"/>
-                </a:solidFill>
-                <a:latin typeface="Bahnschrift SemiBold" panose="020B0502040204020203"/>
-              </a:rPr>
-              <a:t>1/75</a:t>
-            </a:r>
-            <a:endParaRPr sz="2000" b="0">
-              <a:solidFill>
-                <a:srgbClr val="111111"/>
-              </a:solidFill>
-              <a:latin typeface="Bahnschrift SemiBold" panose="020B0502040204020203"/>
-            </a:endParaRPr>
-          </a:p>
-        </p:txBody>
-      </p:sp>
-      <p:sp>
-        <p:nvSpPr>
-          <p:cNvPr id="14" name="TextBox 13"/>
-          <p:cNvSpPr txBox="1"/>
-          <p:nvPr/>
-        </p:nvSpPr>
-        <p:spPr>
-          <a:xfrm>
-            <a:off x="4517136" y="4288536"/>
-            <a:ext cx="2139696" cy="237744"/>
-          </a:xfrm>
-          <a:prstGeom prst="rect">
-            <a:avLst/>
-          </a:prstGeom>
-          <a:noFill/>
-        </p:spPr>
-        <p:txBody>
-          <a:bodyPr wrap="square" lIns="0" tIns="0" rIns="0" bIns="0" anchor="t">
-            <a:spAutoFit/>
-          </a:bodyPr>
-          <a:lstStyle/>
-          <a:p>
-            <a:pPr algn="ctr">
-              <a:lnSpc>
-                <a:spcPct val="100000"/>
-              </a:lnSpc>
-            </a:pPr>
-            <a:r>
-              <a:rPr sz="800" b="0" spc="200">
-                <a:solidFill>
-                  <a:srgbClr val="A6A6A4"/>
-                </a:solidFill>
-                <a:latin typeface="Segoe UI" panose="020B0502040204020203"/>
-              </a:rPr>
-              <a:t>BENIGN SPANS QUARANTINED</a:t>
-            </a:r>
-            <a:endParaRPr sz="800" b="0" spc="200">
-              <a:solidFill>
-                <a:srgbClr val="A6A6A4"/>
-              </a:solidFill>
-              <a:latin typeface="Segoe UI" panose="020B0502040204020203"/>
-            </a:endParaRPr>
-          </a:p>
-        </p:txBody>
-      </p:sp>
-      <p:sp>
-        <p:nvSpPr>
-          <p:cNvPr id="15" name="Arc 14"/>
-          <p:cNvSpPr/>
-          <p:nvPr/>
-        </p:nvSpPr>
-        <p:spPr>
-          <a:xfrm>
-            <a:off x="8686800" y="2916936"/>
-            <a:ext cx="1225296" cy="1225296"/>
-          </a:xfrm>
-          <a:prstGeom prst="arc">
-            <a:avLst>
-              <a:gd name="adj1" fmla="val -9000000"/>
-              <a:gd name="adj2" fmla="val 26989999"/>
-            </a:avLst>
-          </a:prstGeom>
-          <a:noFill/>
-          <a:ln w="31750">
-            <a:solidFill>
-              <a:srgbClr val="DDDDDA"/>
-            </a:solidFill>
-          </a:ln>
-          <a:effectLst/>
-        </p:spPr>
-        <p:style>
-          <a:lnRef idx="1">
-            <a:schemeClr val="accent1"/>
-          </a:lnRef>
-          <a:fillRef idx="3">
-            <a:schemeClr val="accent1"/>
-          </a:fillRef>
-          <a:effectRef idx="2">
-            <a:schemeClr val="accent1"/>
-          </a:effectRef>
-          <a:fontRef idx="minor">
-            <a:schemeClr val="lt1"/>
-          </a:fontRef>
-        </p:style>
-        <p:txBody>
-          <a:bodyPr rtlCol="0" anchor="ctr"/>
-          <a:lstStyle/>
-          <a:p>
-            <a:pPr algn="ctr"/>
-          </a:p>
-        </p:txBody>
-      </p:sp>
-      <p:sp>
-        <p:nvSpPr>
-          <p:cNvPr id="16" name="Arc 15"/>
-          <p:cNvSpPr/>
-          <p:nvPr/>
-        </p:nvSpPr>
-        <p:spPr>
-          <a:xfrm>
-            <a:off x="8686800" y="2916936"/>
-            <a:ext cx="1225296" cy="1225296"/>
-          </a:xfrm>
-          <a:prstGeom prst="arc">
-            <a:avLst>
-              <a:gd name="adj1" fmla="val -9000000"/>
-              <a:gd name="adj2" fmla="val 2880000"/>
-            </a:avLst>
-          </a:prstGeom>
-          <a:noFill/>
-          <a:ln w="38100">
-            <a:solidFill>
-              <a:srgbClr val="5B52E0"/>
-            </a:solidFill>
-          </a:ln>
-          <a:effectLst/>
-        </p:spPr>
-        <p:style>
-          <a:lnRef idx="1">
-            <a:schemeClr val="accent1"/>
-          </a:lnRef>
-          <a:fillRef idx="3">
-            <a:schemeClr val="accent1"/>
-          </a:fillRef>
-          <a:effectRef idx="2">
-            <a:schemeClr val="accent1"/>
-          </a:effectRef>
-          <a:fontRef idx="minor">
-            <a:schemeClr val="lt1"/>
-          </a:fontRef>
-        </p:style>
-        <p:txBody>
-          <a:bodyPr rtlCol="0" anchor="ctr"/>
-          <a:lstStyle/>
-          <a:p>
-            <a:pPr algn="ctr"/>
-          </a:p>
-        </p:txBody>
-      </p:sp>
-      <p:sp>
-        <p:nvSpPr>
-          <p:cNvPr id="17" name="TextBox 16"/>
-          <p:cNvSpPr txBox="1"/>
-          <p:nvPr/>
-        </p:nvSpPr>
-        <p:spPr>
-          <a:xfrm>
-            <a:off x="8686800" y="3310128"/>
-            <a:ext cx="1225296" cy="402336"/>
-          </a:xfrm>
-          <a:prstGeom prst="rect">
-            <a:avLst/>
-          </a:prstGeom>
-          <a:noFill/>
-        </p:spPr>
-        <p:txBody>
-          <a:bodyPr wrap="square" lIns="0" tIns="0" rIns="0" bIns="0" anchor="t">
-            <a:spAutoFit/>
-          </a:bodyPr>
-          <a:lstStyle/>
-          <a:p>
-            <a:pPr algn="ctr">
-              <a:lnSpc>
-                <a:spcPct val="100000"/>
-              </a:lnSpc>
-            </a:pPr>
-            <a:r>
-              <a:rPr sz="2000" b="0">
-                <a:solidFill>
-                  <a:srgbClr val="111111"/>
-                </a:solidFill>
-                <a:latin typeface="Bahnschrift SemiBold" panose="020B0502040204020203"/>
-              </a:rPr>
-              <a:t>33/100</a:t>
-            </a:r>
-            <a:endParaRPr sz="2000" b="0">
-              <a:solidFill>
-                <a:srgbClr val="111111"/>
-              </a:solidFill>
-              <a:latin typeface="Bahnschrift SemiBold" panose="020B0502040204020203"/>
-            </a:endParaRPr>
-          </a:p>
-        </p:txBody>
-      </p:sp>
-      <p:sp>
-        <p:nvSpPr>
-          <p:cNvPr id="18" name="TextBox 17"/>
-          <p:cNvSpPr txBox="1"/>
-          <p:nvPr/>
-        </p:nvSpPr>
-        <p:spPr>
-          <a:xfrm>
-            <a:off x="8229600" y="4288536"/>
-            <a:ext cx="2139696" cy="237744"/>
-          </a:xfrm>
-          <a:prstGeom prst="rect">
-            <a:avLst/>
-          </a:prstGeom>
-          <a:noFill/>
-        </p:spPr>
-        <p:txBody>
-          <a:bodyPr wrap="square" lIns="0" tIns="0" rIns="0" bIns="0" anchor="t">
-            <a:spAutoFit/>
-          </a:bodyPr>
-          <a:lstStyle/>
-          <a:p>
-            <a:pPr algn="ctr">
-              <a:lnSpc>
-                <a:spcPct val="100000"/>
-              </a:lnSpc>
-            </a:pPr>
-            <a:r>
-              <a:rPr sz="800" b="0" spc="200">
-                <a:solidFill>
-                  <a:srgbClr val="A6A6A4"/>
-                </a:solidFill>
-                <a:latin typeface="Segoe UI" panose="020B0502040204020203"/>
-              </a:rPr>
-              <a:t>OF THE LATENCY BUDGET</a:t>
-            </a:r>
-            <a:endParaRPr sz="800" b="0" spc="200">
-              <a:solidFill>
-                <a:srgbClr val="A6A6A4"/>
-              </a:solidFill>
-              <a:latin typeface="Segoe UI" panose="020B0502040204020203"/>
-            </a:endParaRPr>
-          </a:p>
-        </p:txBody>
-      </p:sp>
-      <p:sp>
-        <p:nvSpPr>
-          <p:cNvPr id="19" name="TextBox 18"/>
-          <p:cNvSpPr txBox="1"/>
-          <p:nvPr/>
-        </p:nvSpPr>
-        <p:spPr>
-          <a:xfrm>
-            <a:off x="2743200" y="2889504"/>
-            <a:ext cx="2011680" cy="662151"/>
-          </a:xfrm>
-          <a:prstGeom prst="rect">
-            <a:avLst/>
-          </a:prstGeom>
-          <a:noFill/>
-        </p:spPr>
-        <p:txBody>
-          <a:bodyPr wrap="square" lIns="0" tIns="0" rIns="0" bIns="0" anchor="t">
-            <a:spAutoFit/>
-          </a:bodyPr>
-          <a:lstStyle/>
-          <a:p>
-            <a:pPr algn="l">
-              <a:lnSpc>
-                <a:spcPct val="94000"/>
-              </a:lnSpc>
-            </a:pPr>
-            <a:r>
-              <a:rPr sz="4200" b="0" spc="-100">
-                <a:solidFill>
-                  <a:srgbClr val="5B52E0"/>
-                </a:solidFill>
-                <a:latin typeface="Bahnschrift SemiBold" panose="020B0502040204020203"/>
-              </a:rPr>
-              <a:t>100%</a:t>
-            </a:r>
-            <a:endParaRPr sz="4200" b="0" spc="-100">
-              <a:solidFill>
-                <a:srgbClr val="5B52E0"/>
-              </a:solidFill>
-              <a:latin typeface="Bahnschrift SemiBold" panose="020B0502040204020203"/>
-            </a:endParaRPr>
-          </a:p>
-        </p:txBody>
-      </p:sp>
-      <p:sp>
-        <p:nvSpPr>
-          <p:cNvPr id="20" name="TextBox 19"/>
-          <p:cNvSpPr txBox="1"/>
-          <p:nvPr/>
-        </p:nvSpPr>
-        <p:spPr>
-          <a:xfrm>
-            <a:off x="6455664" y="2889504"/>
-            <a:ext cx="2011680" cy="662151"/>
-          </a:xfrm>
-          <a:prstGeom prst="rect">
-            <a:avLst/>
-          </a:prstGeom>
-          <a:noFill/>
-        </p:spPr>
-        <p:txBody>
-          <a:bodyPr wrap="square" lIns="0" tIns="0" rIns="0" bIns="0" anchor="t">
-            <a:spAutoFit/>
-          </a:bodyPr>
-          <a:lstStyle/>
-          <a:p>
-            <a:pPr algn="l">
-              <a:lnSpc>
-                <a:spcPct val="94000"/>
-              </a:lnSpc>
-            </a:pPr>
-            <a:r>
-              <a:rPr sz="4200" b="0" spc="-100">
-                <a:solidFill>
-                  <a:srgbClr val="5B52E0"/>
-                </a:solidFill>
-                <a:latin typeface="Bahnschrift SemiBold" panose="020B0502040204020203"/>
-              </a:rPr>
-              <a:t>1.33%</a:t>
-            </a:r>
-            <a:endParaRPr sz="4200" b="0" spc="-100">
-              <a:solidFill>
-                <a:srgbClr val="5B52E0"/>
-              </a:solidFill>
-              <a:latin typeface="Bahnschrift SemiBold" panose="020B0502040204020203"/>
-            </a:endParaRPr>
-          </a:p>
-        </p:txBody>
-      </p:sp>
-      <p:sp>
-        <p:nvSpPr>
-          <p:cNvPr id="21" name="TextBox 20"/>
-          <p:cNvSpPr txBox="1"/>
-          <p:nvPr/>
-        </p:nvSpPr>
-        <p:spPr>
-          <a:xfrm>
-            <a:off x="10168128" y="2889504"/>
-            <a:ext cx="2011680" cy="662151"/>
-          </a:xfrm>
-          <a:prstGeom prst="rect">
-            <a:avLst/>
-          </a:prstGeom>
-          <a:noFill/>
-        </p:spPr>
-        <p:txBody>
-          <a:bodyPr wrap="square" lIns="0" tIns="0" rIns="0" bIns="0" anchor="t">
-            <a:spAutoFit/>
-          </a:bodyPr>
-          <a:lstStyle/>
-          <a:p>
-            <a:pPr algn="l">
-              <a:lnSpc>
-                <a:spcPct val="94000"/>
-              </a:lnSpc>
-            </a:pPr>
-            <a:r>
-              <a:rPr sz="4200" b="0" spc="-100">
-                <a:solidFill>
-                  <a:srgbClr val="5B52E0"/>
-                </a:solidFill>
-                <a:latin typeface="Bahnschrift SemiBold" panose="020B0502040204020203"/>
-              </a:rPr>
-              <a:t>33ms</a:t>
-            </a:r>
-            <a:endParaRPr sz="4200" b="0" spc="-100">
-              <a:solidFill>
-                <a:srgbClr val="5B52E0"/>
-              </a:solidFill>
-              <a:latin typeface="Bahnschrift SemiBold" panose="020B0502040204020203"/>
-            </a:endParaRPr>
-          </a:p>
-        </p:txBody>
-      </p:sp>
-      <p:sp>
-        <p:nvSpPr>
-          <p:cNvPr id="22" name="TextBox 21"/>
-          <p:cNvSpPr txBox="1"/>
-          <p:nvPr/>
-        </p:nvSpPr>
-        <p:spPr>
-          <a:xfrm>
-            <a:off x="960120" y="4590288"/>
-            <a:ext cx="3108960" cy="365760"/>
-          </a:xfrm>
-          <a:prstGeom prst="rect">
-            <a:avLst/>
-          </a:prstGeom>
-          <a:noFill/>
-        </p:spPr>
-        <p:txBody>
-          <a:bodyPr wrap="square" lIns="0" tIns="0" rIns="0" bIns="0" anchor="t">
-            <a:spAutoFit/>
-          </a:bodyPr>
-          <a:lstStyle/>
-          <a:p>
-            <a:pPr algn="l">
-              <a:lnSpc>
-                <a:spcPct val="145000"/>
-              </a:lnSpc>
-            </a:pPr>
-            <a:r>
-              <a:rPr sz="950" b="0">
-                <a:solidFill>
-                  <a:srgbClr val="777777"/>
-                </a:solidFill>
-                <a:latin typeface="Segoe UI" panose="020B0502040204020203"/>
-              </a:rPr>
-              <a:t>42 of 42 unprotected → 0 of 42 protected · target ≥ 90%</a:t>
-            </a:r>
-            <a:endParaRPr sz="950" b="0">
-              <a:solidFill>
-                <a:srgbClr val="777777"/>
-              </a:solidFill>
-              <a:latin typeface="Segoe UI" panose="020B0502040204020203"/>
-            </a:endParaRPr>
-          </a:p>
-        </p:txBody>
-      </p:sp>
-      <p:sp>
-        <p:nvSpPr>
-          <p:cNvPr id="23" name="TextBox 22"/>
-          <p:cNvSpPr txBox="1"/>
-          <p:nvPr/>
-        </p:nvSpPr>
-        <p:spPr>
-          <a:xfrm>
-            <a:off x="4672583" y="4590288"/>
-            <a:ext cx="3108960" cy="365760"/>
-          </a:xfrm>
-          <a:prstGeom prst="rect">
-            <a:avLst/>
-          </a:prstGeom>
-          <a:noFill/>
-        </p:spPr>
-        <p:txBody>
-          <a:bodyPr wrap="square" lIns="0" tIns="0" rIns="0" bIns="0" anchor="t">
-            <a:spAutoFit/>
-          </a:bodyPr>
-          <a:lstStyle/>
-          <a:p>
-            <a:pPr algn="l">
-              <a:lnSpc>
-                <a:spcPct val="145000"/>
-              </a:lnSpc>
-            </a:pPr>
-            <a:r>
-              <a:rPr sz="950" b="0">
-                <a:solidFill>
-                  <a:srgbClr val="777777"/>
-                </a:solidFill>
-                <a:latin typeface="Segoe UI" panose="020B0502040204020203"/>
-              </a:rPr>
-              <a:t>1 of 75 spans, measured per span · target &lt; 2%</a:t>
-            </a:r>
-            <a:endParaRPr sz="950" b="0">
-              <a:solidFill>
-                <a:srgbClr val="777777"/>
-              </a:solidFill>
-              <a:latin typeface="Segoe UI" panose="020B0502040204020203"/>
-            </a:endParaRPr>
-          </a:p>
-        </p:txBody>
-      </p:sp>
-      <p:sp>
-        <p:nvSpPr>
-          <p:cNvPr id="24" name="TextBox 23"/>
-          <p:cNvSpPr txBox="1"/>
-          <p:nvPr/>
-        </p:nvSpPr>
-        <p:spPr>
-          <a:xfrm>
-            <a:off x="8385048" y="4590288"/>
-            <a:ext cx="3108960" cy="365760"/>
-          </a:xfrm>
-          <a:prstGeom prst="rect">
-            <a:avLst/>
-          </a:prstGeom>
-          <a:noFill/>
-        </p:spPr>
-        <p:txBody>
-          <a:bodyPr wrap="square" lIns="0" tIns="0" rIns="0" bIns="0" anchor="t">
-            <a:spAutoFit/>
-          </a:bodyPr>
-          <a:lstStyle/>
-          <a:p>
-            <a:pPr algn="l">
-              <a:lnSpc>
-                <a:spcPct val="145000"/>
-              </a:lnSpc>
-            </a:pPr>
-            <a:r>
-              <a:rPr sz="950" b="0">
-                <a:solidFill>
-                  <a:srgbClr val="777777"/>
-                </a:solidFill>
-                <a:latin typeface="Segoe UI" panose="020B0502040204020203"/>
-              </a:rPr>
-              <a:t>deterministic path, no model call · target &lt; 100 ms</a:t>
-            </a:r>
-            <a:endParaRPr sz="950" b="0">
-              <a:solidFill>
-                <a:srgbClr val="777777"/>
-              </a:solidFill>
-              <a:latin typeface="Segoe UI" panose="020B0502040204020203"/>
-            </a:endParaRPr>
-          </a:p>
-        </p:txBody>
-      </p:sp>
-      <p:sp>
-        <p:nvSpPr>
-          <p:cNvPr id="25" name="Rectangle 24"/>
-          <p:cNvSpPr/>
-          <p:nvPr/>
-        </p:nvSpPr>
-        <p:spPr>
-          <a:xfrm>
-            <a:off x="914400" y="5193792"/>
-            <a:ext cx="10362895" cy="10972"/>
-          </a:xfrm>
-          <a:prstGeom prst="rect">
-            <a:avLst/>
-          </a:prstGeom>
-          <a:solidFill>
-            <a:srgbClr val="DDDDDA"/>
-          </a:solidFill>
-          <a:ln>
-            <a:noFill/>
-          </a:ln>
-          <a:effectLst/>
-        </p:spPr>
-        <p:style>
-          <a:lnRef idx="1">
-            <a:schemeClr val="accent1"/>
-          </a:lnRef>
-          <a:fillRef idx="3">
-            <a:schemeClr val="accent1"/>
-          </a:fillRef>
-          <a:effectRef idx="2">
-            <a:schemeClr val="accent1"/>
-          </a:effectRef>
-          <a:fontRef idx="minor">
-            <a:schemeClr val="lt1"/>
-          </a:fontRef>
-        </p:style>
-        <p:txBody>
-          <a:bodyPr wrap="square" rtlCol="0" anchor="ctr"/>
-          <a:lstStyle/>
-          <a:p>
-            <a:pPr algn="ctr"/>
-          </a:p>
-        </p:txBody>
-      </p:sp>
-      <p:sp>
-        <p:nvSpPr>
-          <p:cNvPr id="26" name="TextBox 25"/>
-          <p:cNvSpPr txBox="1"/>
-          <p:nvPr/>
-        </p:nvSpPr>
-        <p:spPr>
-          <a:xfrm>
-            <a:off x="914400" y="5394960"/>
-            <a:ext cx="5486400" cy="219456"/>
-          </a:xfrm>
-          <a:prstGeom prst="rect">
-            <a:avLst/>
-          </a:prstGeom>
-          <a:noFill/>
-        </p:spPr>
-        <p:txBody>
-          <a:bodyPr wrap="square" lIns="0" tIns="0" rIns="0" bIns="0" anchor="t">
-            <a:spAutoFit/>
-          </a:bodyPr>
-          <a:lstStyle/>
-          <a:p>
-            <a:pPr algn="l">
-              <a:lnSpc>
-                <a:spcPct val="100000"/>
-              </a:lnSpc>
-            </a:pPr>
-            <a:r>
-              <a:rPr sz="800" b="0" spc="260">
-                <a:solidFill>
-                  <a:srgbClr val="5B52E0"/>
-                </a:solidFill>
-                <a:latin typeface="Segoe UI" panose="020B0502040204020203"/>
-              </a:rPr>
-              <a:t>REPORTED HONESTLY</a:t>
-            </a:r>
-            <a:endParaRPr sz="800" b="0" spc="260">
-              <a:solidFill>
-                <a:srgbClr val="5B52E0"/>
-              </a:solidFill>
-              <a:latin typeface="Segoe UI" panose="020B0502040204020203"/>
-            </a:endParaRPr>
-          </a:p>
-        </p:txBody>
-      </p:sp>
-      <p:sp>
-        <p:nvSpPr>
-          <p:cNvPr id="27" name="TextBox 26"/>
-          <p:cNvSpPr txBox="1"/>
-          <p:nvPr/>
-        </p:nvSpPr>
-        <p:spPr>
-          <a:xfrm>
-            <a:off x="914400" y="5669280"/>
-            <a:ext cx="10362895" cy="257810"/>
-          </a:xfrm>
-          <a:prstGeom prst="rect">
-            <a:avLst/>
-          </a:prstGeom>
-          <a:noFill/>
-        </p:spPr>
-        <p:txBody>
-          <a:bodyPr wrap="square" lIns="0" tIns="0" rIns="0" bIns="0">
-            <a:spAutoFit/>
-          </a:bodyPr>
-          <a:lstStyle/>
-          <a:p>
-            <a:pPr>
-              <a:lnSpc>
-                <a:spcPct val="160000"/>
-              </a:lnSpc>
-            </a:pPr>
-            <a:r>
-              <a:rPr sz="1050" b="0">
-                <a:solidFill>
-                  <a:srgbClr val="111111"/>
-                </a:solidFill>
-                <a:latin typeface="Segoe UI" panose="020B0502040204020203"/>
-              </a:rPr>
-              <a:t>The unprotected baseline reproduces all 42 attacks</a:t>
-            </a:r>
-            <a:r>
-              <a:rPr lang="en-US" sz="1050" b="0">
-                <a:solidFill>
-                  <a:srgbClr val="111111"/>
-                </a:solidFill>
-                <a:latin typeface="Segoe UI" panose="020B0502040204020203"/>
-              </a:rPr>
-              <a:t>:</a:t>
-            </a:r>
-            <a:r>
-              <a:rPr sz="1050" b="0">
-                <a:solidFill>
-                  <a:srgbClr val="111111"/>
-                </a:solidFill>
-                <a:latin typeface="Segoe UI" panose="020B0502040204020203"/>
-              </a:rPr>
-              <a:t> </a:t>
-            </a:r>
-            <a:r>
-              <a:rPr sz="1050">
-                <a:solidFill>
-                  <a:srgbClr val="444444"/>
-                </a:solidFill>
-                <a:latin typeface="Segoe UI" panose="020B0502040204020203"/>
-              </a:rPr>
-              <a:t>a defence cannot take credit for an attack that never worked.</a:t>
-            </a:r>
-            <a:endParaRPr sz="1050">
-              <a:solidFill>
-                <a:srgbClr val="444444"/>
-              </a:solidFill>
-              <a:latin typeface="Segoe UI" panose="020B0502040204020203"/>
-            </a:endParaRPr>
-          </a:p>
-        </p:txBody>
-      </p:sp>
-      <p:sp>
-        <p:nvSpPr>
-          <p:cNvPr id="28" name="TextBox 27"/>
-          <p:cNvSpPr txBox="1"/>
-          <p:nvPr/>
-        </p:nvSpPr>
-        <p:spPr>
-          <a:xfrm>
-            <a:off x="914400" y="5998464"/>
-            <a:ext cx="10362895" cy="365760"/>
-          </a:xfrm>
-          <a:prstGeom prst="rect">
-            <a:avLst/>
-          </a:prstGeom>
-          <a:noFill/>
-        </p:spPr>
-        <p:txBody>
-          <a:bodyPr wrap="square" lIns="0" tIns="0" rIns="0" bIns="0">
-            <a:spAutoFit/>
-          </a:bodyPr>
-          <a:lstStyle/>
-          <a:p>
-            <a:pPr>
-              <a:lnSpc>
-                <a:spcPct val="160000"/>
-              </a:lnSpc>
-            </a:pPr>
-            <a:r>
-              <a:rPr sz="1050" b="0">
-                <a:solidFill>
-                  <a:srgbClr val="111111"/>
-                </a:solidFill>
-                <a:latin typeface="Segoe UI" panose="020B0502040204020203"/>
-              </a:rPr>
-              <a:t>The single false positive is a security article quoting a payload — </a:t>
-            </a:r>
-            <a:r>
-              <a:rPr sz="1050">
-                <a:solidFill>
-                  <a:srgbClr val="444444"/>
-                </a:solidFill>
-                <a:latin typeface="Segoe UI" panose="020B0502040204020203"/>
-              </a:rPr>
-              <a:t>it stays in the corpus and we report it.</a:t>
-            </a:r>
-            <a:endParaRPr sz="1050">
-              <a:solidFill>
-                <a:srgbClr val="444444"/>
-              </a:solidFill>
-              <a:latin typeface="Segoe UI" panose="020B0502040204020203"/>
-            </a:endParaRPr>
-          </a:p>
-        </p:txBody>
-      </p:sp>
-      <p:sp>
-        <p:nvSpPr>
-          <p:cNvPr id="29" name="TextBox 28"/>
-          <p:cNvSpPr txBox="1"/>
-          <p:nvPr/>
-        </p:nvSpPr>
-        <p:spPr>
-          <a:xfrm>
-            <a:off x="914400" y="6364224"/>
-            <a:ext cx="5486400" cy="237744"/>
-          </a:xfrm>
-          <a:prstGeom prst="rect">
-            <a:avLst/>
-          </a:prstGeom>
-          <a:noFill/>
-        </p:spPr>
-        <p:txBody>
-          <a:bodyPr wrap="square" lIns="0" tIns="0" rIns="0" bIns="0" anchor="t">
-            <a:spAutoFit/>
-          </a:bodyPr>
-          <a:lstStyle/>
-          <a:p>
-            <a:pPr algn="l">
-              <a:lnSpc>
-                <a:spcPct val="100000"/>
-              </a:lnSpc>
-            </a:pPr>
-            <a:r>
-              <a:rPr sz="800" b="0" spc="240">
-                <a:solidFill>
-                  <a:srgbClr val="A6A6A4"/>
-                </a:solidFill>
-                <a:latin typeface="Segoe UI" panose="020B0502040204020203"/>
-              </a:rPr>
-              <a:t>MEMBRANE</a:t>
-            </a:r>
-            <a:endParaRPr sz="800" b="0" spc="240">
-              <a:solidFill>
-                <a:srgbClr val="A6A6A4"/>
-              </a:solidFill>
-              <a:latin typeface="Segoe UI" panose="020B0502040204020203"/>
-            </a:endParaRPr>
-          </a:p>
-        </p:txBody>
-      </p:sp>
-    </p:spTree>
-  </p:cSld>
-  <p:clrMapOvr>
-    <a:masterClrMapping/>
-  </p:clrMapOvr>
-</p:sld>
-</file>
-
-<file path=ppt/slides/slide12.xml><?xml version="1.0" encoding="utf-8"?>
-<p:sld xmlns:a="http://schemas.openxmlformats.org/drawingml/2006/main" xmlns:r="http://schemas.openxmlformats.org/officeDocument/2006/relationships" xmlns:p="http://schemas.openxmlformats.org/presentationml/2006/main">
-  <p:cSld>
-    <p:spTree>
-      <p:nvGrpSpPr>
-        <p:cNvPr id="1" name=""/>
-        <p:cNvGrpSpPr/>
-        <p:nvPr/>
-      </p:nvGrpSpPr>
-      <p:grpSpPr/>
-      <p:sp>
-        <p:nvSpPr>
           <p:cNvPr id="3" name="Rectangle 2"/>
           <p:cNvSpPr/>
           <p:nvPr/>
@@ -13024,7 +12592,7 @@
                 </a:solidFill>
                 <a:latin typeface="Segoe UI" panose="020B0502040204020203"/>
               </a:rPr>
-              <a:t>FLOW</a:t>
+              <a:t>WORKING SOFTWARE</a:t>
             </a:r>
             <a:endParaRPr sz="800" b="0" spc="260">
               <a:solidFill>
@@ -13069,7 +12637,7 @@
                 </a:solidFill>
                 <a:latin typeface="Bahnschrift SemiBold" panose="020B0502040204020203"/>
               </a:rPr>
-              <a:t>SIX STAGES, FOUR VERDICTS</a:t>
+              <a:t>THE LIVE CONSOLE</a:t>
             </a:r>
             <a:endParaRPr sz="3800" b="0" spc="40">
               <a:solidFill>
@@ -13158,7 +12726,7 @@
                 </a:solidFill>
                 <a:latin typeface="Segoe UI" panose="020B0502040204020203"/>
               </a:rPr>
-              <a:t>The design constraint is that the common case — clean content from a reputable source — completes on the deterministic path without invoking a model at all.</a:t>
+              <a:t>Every verdict the proxy reaches, streamed as it reaches it — which layer stopped what, added latency against budget, and a one-click attack that drives the real pipeline.</a:t>
             </a:r>
             <a:endParaRPr sz="1150" b="0">
               <a:solidFill>
@@ -13171,7 +12739,7 @@
       </p:sp>
       <p:pic>
         <p:nvPicPr>
-          <p:cNvPr id="7" name="Picture 6" descr="02-lifecycle.png"/>
+          <p:cNvPr id="7" name="Picture 6" descr="01-dashboard.png"/>
           <p:cNvPicPr>
             <a:picLocks noChangeAspect="1"/>
           </p:cNvPicPr>
@@ -13185,8 +12753,8 @@
         </p:blipFill>
         <p:spPr>
           <a:xfrm>
-            <a:off x="640080" y="3170420"/>
-            <a:ext cx="10908792" cy="1961912"/>
+            <a:off x="807720" y="2516505"/>
+            <a:ext cx="5093970" cy="3657600"/>
           </a:xfrm>
           <a:prstGeom prst="rect">
             <a:avLst/>
@@ -13195,96 +12763,7 @@
       </p:pic>
       <p:sp>
         <p:nvSpPr>
-          <p:cNvPr id="8" name="Rectangle 7"/>
-          <p:cNvSpPr/>
-          <p:nvPr/>
-        </p:nvSpPr>
-        <p:spPr>
-          <a:xfrm>
-            <a:off x="914400" y="5797296"/>
-            <a:ext cx="10362895" cy="10972"/>
-          </a:xfrm>
-          <a:prstGeom prst="rect">
-            <a:avLst/>
-          </a:prstGeom>
-          <a:solidFill>
-            <a:srgbClr val="DDDDDA"/>
-          </a:solidFill>
-          <a:ln>
-            <a:noFill/>
-          </a:ln>
-          <a:effectLst/>
-        </p:spPr>
-        <p:style>
-          <a:lnRef idx="1">
-            <a:schemeClr val="accent1"/>
-          </a:lnRef>
-          <a:fillRef idx="3">
-            <a:schemeClr val="accent1"/>
-          </a:fillRef>
-          <a:effectRef idx="2">
-            <a:schemeClr val="accent1"/>
-          </a:effectRef>
-          <a:fontRef idx="minor">
-            <a:schemeClr val="lt1"/>
-          </a:fontRef>
-        </p:style>
-        <p:txBody>
-          <a:bodyPr wrap="square" rtlCol="0" anchor="ctr"/>
-          <a:lstStyle/>
-          <a:p>
-            <a:pPr algn="ctr"/>
-          </a:p>
-        </p:txBody>
-      </p:sp>
-      <p:sp>
-        <p:nvSpPr>
-          <p:cNvPr id="9" name="TextBox 8"/>
-          <p:cNvSpPr txBox="1"/>
-          <p:nvPr/>
-        </p:nvSpPr>
-        <p:spPr>
-          <a:xfrm>
-            <a:off x="914400" y="5980176"/>
-            <a:ext cx="10362895" cy="292608"/>
-          </a:xfrm>
-          <a:prstGeom prst="rect">
-            <a:avLst/>
-          </a:prstGeom>
-          <a:noFill/>
-        </p:spPr>
-        <p:txBody>
-          <a:bodyPr wrap="square" lIns="0" tIns="0" rIns="0" bIns="0" anchor="t">
-            <a:spAutoFit/>
-          </a:bodyPr>
-          <a:lstStyle/>
-          <a:p>
-            <a:pPr algn="l">
-              <a:lnSpc>
-                <a:spcPct val="162000"/>
-              </a:lnSpc>
-            </a:pPr>
-            <a:r>
-              <a:rPr sz="1100" b="0">
-                <a:solidFill>
-                  <a:srgbClr val="111111"/>
-                </a:solidFill>
-                <a:latin typeface="Segoe UI" panose="020B0502040204020203"/>
-              </a:rPr>
-              <a:t>Hold is the outcome that distinguishes Membrane: uncertainty escalates to a human rather than resolving to a guess.</a:t>
-            </a:r>
-            <a:endParaRPr sz="1100" b="0">
-              <a:solidFill>
-                <a:srgbClr val="111111"/>
-              </a:solidFill>
-              <a:latin typeface="Segoe UI" panose="020B0502040204020203"/>
-            </a:endParaRPr>
-          </a:p>
-        </p:txBody>
-      </p:sp>
-      <p:sp>
-        <p:nvSpPr>
-          <p:cNvPr id="10" name="TextBox 9"/>
+          <p:cNvPr id="8" name="TextBox 7"/>
           <p:cNvSpPr txBox="1"/>
           <p:nvPr/>
         </p:nvSpPr>
@@ -13327,6 +12806,30 @@
           </a:p>
         </p:txBody>
       </p:sp>
+      <p:pic>
+        <p:nvPicPr>
+          <p:cNvPr id="10" name="Picture 9" descr="02-held-action.png"/>
+          <p:cNvPicPr>
+            <a:picLocks noChangeAspect="1"/>
+          </p:cNvPicPr>
+          <p:nvPr/>
+        </p:nvPicPr>
+        <p:blipFill>
+          <a:blip r:embed="rId2"/>
+          <a:stretch>
+            <a:fillRect/>
+          </a:stretch>
+        </p:blipFill>
+        <p:spPr>
+          <a:xfrm>
+            <a:off x="6101715" y="2543810"/>
+            <a:ext cx="5647690" cy="3773170"/>
+          </a:xfrm>
+          <a:prstGeom prst="rect">
+            <a:avLst/>
+          </a:prstGeom>
+        </p:spPr>
+      </p:pic>
     </p:spTree>
   </p:cSld>
   <p:clrMapOvr>
